--- a/docs/Présentation Projet Seatle.pptx
+++ b/docs/Présentation Projet Seatle.pptx
@@ -218,7 +218,7 @@
           <a:p>
             <a:fld id="{936B345A-A0DF-425A-BA4A-3B70769BD6ED}" type="datetimeFigureOut">
               <a:rPr lang="fr-FR" smtClean="0"/>
-              <a:t>25/03/2026</a:t>
+              <a:t>27/03/2026</a:t>
             </a:fld>
             <a:endParaRPr lang="fr-FR"/>
           </a:p>
@@ -396,7 +396,7 @@
           <a:p>
             <a:fld id="{8774C3FE-3C4F-468E-9817-8DCA5283E7A1}" type="datetimeFigureOut">
               <a:rPr lang="fr-FR" smtClean="0"/>
-              <a:t>25/03/2026</a:t>
+              <a:t>27/03/2026</a:t>
             </a:fld>
             <a:endParaRPr lang="fr-FR"/>
           </a:p>
@@ -1294,8 +1294,8 @@
         </p:nvSpPr>
         <p:spPr>
           <a:xfrm>
-            <a:off x="152138" y="1344705"/>
-            <a:ext cx="9482750" cy="5021055"/>
+            <a:off x="152138" y="2613272"/>
+            <a:ext cx="9482750" cy="2251065"/>
           </a:xfrm>
           <a:prstGeom prst="rect">
             <a:avLst/>
@@ -1319,15 +1319,15 @@
                   <a:schemeClr val="bg1"/>
                 </a:solidFill>
               </a:rPr>
-              <a:t>La ville de </a:t>
-            </a:r>
-            <a:r>
-              <a:rPr lang="fr-FR" sz="2400" dirty="0" err="1">
+              <a:t>Ce projet vise à prédire ces données pour les </a:t>
+            </a:r>
+            <a:r>
+              <a:rPr lang="fr-FR" sz="2400" b="1" i="1" dirty="0">
                 <a:solidFill>
                   <a:schemeClr val="bg1"/>
                 </a:solidFill>
               </a:rPr>
-              <a:t>Seatle</a:t>
+              <a:t>bâtiments non résidentiels </a:t>
             </a:r>
             <a:r>
               <a:rPr lang="fr-FR" sz="2400" dirty="0">
@@ -1335,7 +1335,7 @@
                   <a:schemeClr val="bg1"/>
                 </a:solidFill>
               </a:rPr>
-              <a:t> a réalisé des relevés détaillés mais coûteux sur les </a:t>
+              <a:t>pour lesquels elles n’ont </a:t>
             </a:r>
             <a:r>
               <a:rPr lang="fr-FR" sz="2400" b="1" i="1" dirty="0">
@@ -1343,7 +1343,7 @@
                   <a:schemeClr val="bg1"/>
                 </a:solidFill>
               </a:rPr>
-              <a:t>émissions de CO₂ </a:t>
+              <a:t>pas encore été mesurées</a:t>
             </a:r>
             <a:r>
               <a:rPr lang="fr-FR" sz="2400" dirty="0">
@@ -1351,25 +1351,38 @@
                   <a:schemeClr val="bg1"/>
                 </a:solidFill>
               </a:rPr>
-              <a:t>et la </a:t>
-            </a:r>
-            <a:r>
-              <a:rPr lang="fr-FR" sz="2400" b="1" i="1" dirty="0">
-                <a:solidFill>
-                  <a:schemeClr val="bg1"/>
-                </a:solidFill>
-              </a:rPr>
-              <a:t>consommation énergétique</a:t>
-            </a:r>
-            <a:r>
-              <a:rPr lang="fr-FR" sz="2400" dirty="0">
-                <a:solidFill>
-                  <a:schemeClr val="bg1"/>
-                </a:solidFill>
-              </a:rPr>
-              <a:t> des bâtiments.</a:t>
+              <a:t>, en exploitant leurs caractéristiques structurelles (taille, usage, année de construction, localisation, etc…).</a:t>
             </a:r>
           </a:p>
+        </p:txBody>
+      </p:sp>
+      <p:sp>
+        <p:nvSpPr>
+          <p:cNvPr id="2" name="ZoneTexte 1">
+            <a:extLst>
+              <a:ext uri="{FF2B5EF4-FFF2-40B4-BE49-F238E27FC236}">
+                <a16:creationId xmlns:a16="http://schemas.microsoft.com/office/drawing/2014/main" id="{5A09B28F-E2DA-D6EA-6A6D-B6AE101C0A92}"/>
+              </a:ext>
+            </a:extLst>
+          </p:cNvPr>
+          <p:cNvSpPr txBox="1"/>
+          <p:nvPr/>
+        </p:nvSpPr>
+        <p:spPr>
+          <a:xfrm>
+            <a:off x="152138" y="1470202"/>
+            <a:ext cx="9482750" cy="1143070"/>
+          </a:xfrm>
+          <a:prstGeom prst="rect">
+            <a:avLst/>
+          </a:prstGeom>
+          <a:noFill/>
+        </p:spPr>
+        <p:txBody>
+          <a:bodyPr wrap="square">
+            <a:spAutoFit/>
+          </a:bodyPr>
+          <a:lstStyle/>
           <a:p>
             <a:pPr algn="just">
               <a:lnSpc>
@@ -1382,7 +1395,23 @@
                   <a:schemeClr val="bg1"/>
                 </a:solidFill>
               </a:rPr>
-              <a:t>Ce projet vise à prédire ces données pour les </a:t>
+              <a:t>La ville de </a:t>
+            </a:r>
+            <a:r>
+              <a:rPr lang="fr-FR" sz="2400" dirty="0" err="1">
+                <a:solidFill>
+                  <a:schemeClr val="bg1"/>
+                </a:solidFill>
+              </a:rPr>
+              <a:t>Seatle</a:t>
+            </a:r>
+            <a:r>
+              <a:rPr lang="fr-FR" sz="2400" dirty="0">
+                <a:solidFill>
+                  <a:schemeClr val="bg1"/>
+                </a:solidFill>
+              </a:rPr>
+              <a:t> a réalisé des relevés détaillés mais coûteux sur les </a:t>
             </a:r>
             <a:r>
               <a:rPr lang="fr-FR" sz="2400" b="1" i="1" dirty="0">
@@ -1390,7 +1419,7 @@
                   <a:schemeClr val="bg1"/>
                 </a:solidFill>
               </a:rPr>
-              <a:t>bâtiments non résidentiels </a:t>
+              <a:t>émissions de CO₂ </a:t>
             </a:r>
             <a:r>
               <a:rPr lang="fr-FR" sz="2400" dirty="0">
@@ -1398,7 +1427,7 @@
                   <a:schemeClr val="bg1"/>
                 </a:solidFill>
               </a:rPr>
-              <a:t>pour lesquels elles n’ont </a:t>
+              <a:t>et la </a:t>
             </a:r>
             <a:r>
               <a:rPr lang="fr-FR" sz="2400" b="1" i="1" dirty="0">
@@ -1406,7 +1435,7 @@
                   <a:schemeClr val="bg1"/>
                 </a:solidFill>
               </a:rPr>
-              <a:t>pas encore été mesurées</a:t>
+              <a:t>consommation énergétique</a:t>
             </a:r>
             <a:r>
               <a:rPr lang="fr-FR" sz="2400" dirty="0">
@@ -1414,9 +1443,38 @@
                   <a:schemeClr val="bg1"/>
                 </a:solidFill>
               </a:rPr>
-              <a:t>, en exploitant leurs caractéristiques structurelles (taille, usage, année de construction, localisation, etc…).</a:t>
+              <a:t> des bâtiments.</a:t>
             </a:r>
           </a:p>
+        </p:txBody>
+      </p:sp>
+      <p:sp>
+        <p:nvSpPr>
+          <p:cNvPr id="3" name="ZoneTexte 2">
+            <a:extLst>
+              <a:ext uri="{FF2B5EF4-FFF2-40B4-BE49-F238E27FC236}">
+                <a16:creationId xmlns:a16="http://schemas.microsoft.com/office/drawing/2014/main" id="{C4216C88-3653-4949-EA15-93EB4740544E}"/>
+              </a:ext>
+            </a:extLst>
+          </p:cNvPr>
+          <p:cNvSpPr txBox="1"/>
+          <p:nvPr/>
+        </p:nvSpPr>
+        <p:spPr>
+          <a:xfrm>
+            <a:off x="152138" y="4864337"/>
+            <a:ext cx="9482750" cy="1697068"/>
+          </a:xfrm>
+          <a:prstGeom prst="rect">
+            <a:avLst/>
+          </a:prstGeom>
+          <a:noFill/>
+        </p:spPr>
+        <p:txBody>
+          <a:bodyPr wrap="square">
+            <a:spAutoFit/>
+          </a:bodyPr>
+          <a:lstStyle/>
           <a:p>
             <a:pPr algn="just">
               <a:lnSpc>
@@ -1524,6 +1582,200 @@
   <p:clrMapOvr>
     <a:masterClrMapping/>
   </p:clrMapOvr>
+  <p:timing>
+    <p:tnLst>
+      <p:par>
+        <p:cTn id="1" dur="indefinite" restart="never" nodeType="tmRoot">
+          <p:childTnLst>
+            <p:seq concurrent="1" nextAc="seek">
+              <p:cTn id="2" dur="indefinite" nodeType="mainSeq">
+                <p:childTnLst>
+                  <p:par>
+                    <p:cTn id="3" fill="hold">
+                      <p:stCondLst>
+                        <p:cond delay="indefinite"/>
+                      </p:stCondLst>
+                      <p:childTnLst>
+                        <p:par>
+                          <p:cTn id="4" fill="hold">
+                            <p:stCondLst>
+                              <p:cond delay="0"/>
+                            </p:stCondLst>
+                            <p:childTnLst>
+                              <p:par>
+                                <p:cTn id="5" presetID="10" presetClass="entr" presetSubtype="0" fill="hold" grpId="0" nodeType="clickEffect">
+                                  <p:stCondLst>
+                                    <p:cond delay="0"/>
+                                  </p:stCondLst>
+                                  <p:childTnLst>
+                                    <p:set>
+                                      <p:cBhvr>
+                                        <p:cTn id="6" dur="1" fill="hold">
+                                          <p:stCondLst>
+                                            <p:cond delay="0"/>
+                                          </p:stCondLst>
+                                        </p:cTn>
+                                        <p:tgtEl>
+                                          <p:spTgt spid="2"/>
+                                        </p:tgtEl>
+                                        <p:attrNameLst>
+                                          <p:attrName>style.visibility</p:attrName>
+                                        </p:attrNameLst>
+                                      </p:cBhvr>
+                                      <p:to>
+                                        <p:strVal val="visible"/>
+                                      </p:to>
+                                    </p:set>
+                                    <p:animEffect transition="in" filter="fade">
+                                      <p:cBhvr>
+                                        <p:cTn id="7" dur="500"/>
+                                        <p:tgtEl>
+                                          <p:spTgt spid="2"/>
+                                        </p:tgtEl>
+                                      </p:cBhvr>
+                                    </p:animEffect>
+                                  </p:childTnLst>
+                                </p:cTn>
+                              </p:par>
+                            </p:childTnLst>
+                          </p:cTn>
+                        </p:par>
+                      </p:childTnLst>
+                    </p:cTn>
+                  </p:par>
+                  <p:par>
+                    <p:cTn id="8" fill="hold">
+                      <p:stCondLst>
+                        <p:cond delay="indefinite"/>
+                      </p:stCondLst>
+                      <p:childTnLst>
+                        <p:par>
+                          <p:cTn id="9" fill="hold">
+                            <p:stCondLst>
+                              <p:cond delay="0"/>
+                            </p:stCondLst>
+                            <p:childTnLst>
+                              <p:par>
+                                <p:cTn id="10" presetID="10" presetClass="entr" presetSubtype="0" fill="hold" grpId="0" nodeType="clickEffect">
+                                  <p:stCondLst>
+                                    <p:cond delay="0"/>
+                                  </p:stCondLst>
+                                  <p:childTnLst>
+                                    <p:set>
+                                      <p:cBhvr>
+                                        <p:cTn id="11" dur="1" fill="hold">
+                                          <p:stCondLst>
+                                            <p:cond delay="0"/>
+                                          </p:stCondLst>
+                                        </p:cTn>
+                                        <p:tgtEl>
+                                          <p:spTgt spid="7"/>
+                                        </p:tgtEl>
+                                        <p:attrNameLst>
+                                          <p:attrName>style.visibility</p:attrName>
+                                        </p:attrNameLst>
+                                      </p:cBhvr>
+                                      <p:to>
+                                        <p:strVal val="visible"/>
+                                      </p:to>
+                                    </p:set>
+                                    <p:animEffect transition="in" filter="fade">
+                                      <p:cBhvr>
+                                        <p:cTn id="12" dur="500"/>
+                                        <p:tgtEl>
+                                          <p:spTgt spid="7"/>
+                                        </p:tgtEl>
+                                      </p:cBhvr>
+                                    </p:animEffect>
+                                  </p:childTnLst>
+                                </p:cTn>
+                              </p:par>
+                            </p:childTnLst>
+                          </p:cTn>
+                        </p:par>
+                      </p:childTnLst>
+                    </p:cTn>
+                  </p:par>
+                  <p:par>
+                    <p:cTn id="13" fill="hold">
+                      <p:stCondLst>
+                        <p:cond delay="indefinite"/>
+                      </p:stCondLst>
+                      <p:childTnLst>
+                        <p:par>
+                          <p:cTn id="14" fill="hold">
+                            <p:stCondLst>
+                              <p:cond delay="0"/>
+                            </p:stCondLst>
+                            <p:childTnLst>
+                              <p:par>
+                                <p:cTn id="15" presetID="10" presetClass="entr" presetSubtype="0" fill="hold" grpId="0" nodeType="clickEffect">
+                                  <p:stCondLst>
+                                    <p:cond delay="0"/>
+                                  </p:stCondLst>
+                                  <p:childTnLst>
+                                    <p:set>
+                                      <p:cBhvr>
+                                        <p:cTn id="16" dur="1" fill="hold">
+                                          <p:stCondLst>
+                                            <p:cond delay="0"/>
+                                          </p:stCondLst>
+                                        </p:cTn>
+                                        <p:tgtEl>
+                                          <p:spTgt spid="3"/>
+                                        </p:tgtEl>
+                                        <p:attrNameLst>
+                                          <p:attrName>style.visibility</p:attrName>
+                                        </p:attrNameLst>
+                                      </p:cBhvr>
+                                      <p:to>
+                                        <p:strVal val="visible"/>
+                                      </p:to>
+                                    </p:set>
+                                    <p:animEffect transition="in" filter="fade">
+                                      <p:cBhvr>
+                                        <p:cTn id="17" dur="500"/>
+                                        <p:tgtEl>
+                                          <p:spTgt spid="3"/>
+                                        </p:tgtEl>
+                                      </p:cBhvr>
+                                    </p:animEffect>
+                                  </p:childTnLst>
+                                </p:cTn>
+                              </p:par>
+                            </p:childTnLst>
+                          </p:cTn>
+                        </p:par>
+                      </p:childTnLst>
+                    </p:cTn>
+                  </p:par>
+                </p:childTnLst>
+              </p:cTn>
+              <p:prevCondLst>
+                <p:cond evt="onPrev" delay="0">
+                  <p:tgtEl>
+                    <p:sldTgt/>
+                  </p:tgtEl>
+                </p:cond>
+              </p:prevCondLst>
+              <p:nextCondLst>
+                <p:cond evt="onNext" delay="0">
+                  <p:tgtEl>
+                    <p:sldTgt/>
+                  </p:tgtEl>
+                </p:cond>
+              </p:nextCondLst>
+            </p:seq>
+          </p:childTnLst>
+        </p:cTn>
+      </p:par>
+    </p:tnLst>
+    <p:bldLst>
+      <p:bldP spid="7" grpId="0"/>
+      <p:bldP spid="2" grpId="0"/>
+      <p:bldP spid="3" grpId="0"/>
+    </p:bldLst>
+  </p:timing>
 </p:sld>
 </file>
 
@@ -1559,7 +1811,7 @@
           <p:nvPr>
             <p:extLst>
               <p:ext uri="{D42A27DB-BD31-4B8C-83A1-F6EECF244321}">
-                <p14:modId xmlns:p14="http://schemas.microsoft.com/office/powerpoint/2010/main" val="2996469193"/>
+                <p14:modId xmlns:p14="http://schemas.microsoft.com/office/powerpoint/2010/main" val="1220653968"/>
               </p:ext>
             </p:extLst>
           </p:nvPr>
@@ -1662,10 +1914,22 @@
                         <a:buNone/>
                       </a:pPr>
                       <a:r>
-                        <a:rPr lang="fr-FR" sz="1300" b="1"/>
+                        <a:rPr lang="fr-FR" sz="1300" b="1" dirty="0">
+                          <a:solidFill>
+                            <a:schemeClr val="accent1">
+                              <a:lumMod val="75000"/>
+                            </a:schemeClr>
+                          </a:solidFill>
+                        </a:rPr>
                         <a:t>Variables de taille</a:t>
                       </a:r>
-                      <a:endParaRPr lang="fr-FR" sz="1300"/>
+                      <a:endParaRPr lang="fr-FR" sz="1300" dirty="0">
+                        <a:solidFill>
+                          <a:schemeClr val="accent1">
+                            <a:lumMod val="75000"/>
+                          </a:schemeClr>
+                        </a:solidFill>
+                      </a:endParaRPr>
                     </a:p>
                   </a:txBody>
                   <a:tcPr marL="64945" marR="64945" marT="32473" marB="32473" anchor="ctr"/>
@@ -1679,42 +1943,102 @@
                         <a:buNone/>
                       </a:pPr>
                       <a:r>
-                        <a:rPr lang="en-US" sz="1300" dirty="0" err="1"/>
+                        <a:rPr lang="en-US" sz="1300" dirty="0" err="1">
+                          <a:solidFill>
+                            <a:schemeClr val="accent1">
+                              <a:lumMod val="75000"/>
+                            </a:schemeClr>
+                          </a:solidFill>
+                        </a:rPr>
                         <a:t>PropertyGFATotal</a:t>
                       </a:r>
                       <a:r>
-                        <a:rPr lang="en-US" sz="1300" dirty="0"/>
+                        <a:rPr lang="en-US" sz="1300" dirty="0">
+                          <a:solidFill>
+                            <a:schemeClr val="accent1">
+                              <a:lumMod val="75000"/>
+                            </a:schemeClr>
+                          </a:solidFill>
+                        </a:rPr>
                         <a:t>, </a:t>
                       </a:r>
                       <a:r>
-                        <a:rPr lang="en-US" sz="1300" dirty="0" err="1"/>
+                        <a:rPr lang="en-US" sz="1300" dirty="0" err="1">
+                          <a:solidFill>
+                            <a:schemeClr val="accent1">
+                              <a:lumMod val="75000"/>
+                            </a:schemeClr>
+                          </a:solidFill>
+                        </a:rPr>
                         <a:t>PropertyGFABuilding</a:t>
                       </a:r>
                       <a:r>
-                        <a:rPr lang="en-US" sz="1300" dirty="0"/>
+                        <a:rPr lang="en-US" sz="1300" dirty="0">
+                          <a:solidFill>
+                            <a:schemeClr val="accent1">
+                              <a:lumMod val="75000"/>
+                            </a:schemeClr>
+                          </a:solidFill>
+                        </a:rPr>
                         <a:t>(s), </a:t>
                       </a:r>
                       <a:r>
-                        <a:rPr lang="en-US" sz="1300" dirty="0" err="1"/>
+                        <a:rPr lang="en-US" sz="1300" dirty="0" err="1">
+                          <a:solidFill>
+                            <a:schemeClr val="accent1">
+                              <a:lumMod val="75000"/>
+                            </a:schemeClr>
+                          </a:solidFill>
+                        </a:rPr>
                         <a:t>PropertyGFAParking</a:t>
                       </a:r>
                       <a:r>
-                        <a:rPr lang="en-US" sz="1300" dirty="0"/>
+                        <a:rPr lang="en-US" sz="1300" dirty="0">
+                          <a:solidFill>
+                            <a:schemeClr val="accent1">
+                              <a:lumMod val="75000"/>
+                            </a:schemeClr>
+                          </a:solidFill>
+                        </a:rPr>
                         <a:t>, </a:t>
                       </a:r>
                       <a:r>
-                        <a:rPr lang="en-US" sz="1300" dirty="0" err="1"/>
+                        <a:rPr lang="en-US" sz="1300" dirty="0" err="1">
+                          <a:solidFill>
+                            <a:schemeClr val="accent1">
+                              <a:lumMod val="75000"/>
+                            </a:schemeClr>
+                          </a:solidFill>
+                        </a:rPr>
                         <a:t>NumberofFloors</a:t>
                       </a:r>
                       <a:r>
-                        <a:rPr lang="en-US" sz="1300" dirty="0"/>
+                        <a:rPr lang="en-US" sz="1300" dirty="0">
+                          <a:solidFill>
+                            <a:schemeClr val="accent1">
+                              <a:lumMod val="75000"/>
+                            </a:schemeClr>
+                          </a:solidFill>
+                        </a:rPr>
                         <a:t>, </a:t>
                       </a:r>
                       <a:r>
-                        <a:rPr lang="en-US" sz="1300" dirty="0" err="1"/>
+                        <a:rPr lang="en-US" sz="1300" dirty="0" err="1">
+                          <a:solidFill>
+                            <a:schemeClr val="accent1">
+                              <a:lumMod val="75000"/>
+                            </a:schemeClr>
+                          </a:solidFill>
+                        </a:rPr>
                         <a:t>NumberofBuildings</a:t>
                       </a:r>
-                      <a:endParaRPr lang="en-US" sz="1300" dirty="0"/>
+                      <a:endParaRPr lang="en-US" sz="1300" dirty="0">
+                        <a:solidFill>
+                          <a:schemeClr val="accent1">
+                            <a:lumMod val="75000"/>
+                          </a:schemeClr>
+                        </a:solidFill>
+                      </a:endParaRPr>
                     </a:p>
                   </a:txBody>
                   <a:tcPr marL="64945" marR="64945" marT="32473" marB="32473" anchor="ctr"/>
@@ -1742,17 +2066,31 @@
                         <a:defRPr/>
                       </a:pPr>
                       <a:r>
-                        <a:rPr lang="fr-FR" sz="1300" dirty="0" err="1"/>
+                        <a:rPr lang="fr-FR" sz="1300" dirty="0" err="1">
+                          <a:solidFill>
+                            <a:schemeClr val="accent1">
+                              <a:lumMod val="75000"/>
+                            </a:schemeClr>
+                          </a:solidFill>
+                        </a:rPr>
                         <a:t>PropertyGFATotal</a:t>
                       </a:r>
                       <a:r>
-                        <a:rPr lang="fr-FR" sz="1300" dirty="0"/>
+                        <a:rPr lang="fr-FR" sz="1300" dirty="0">
+                          <a:solidFill>
+                            <a:schemeClr val="accent1">
+                              <a:lumMod val="75000"/>
+                            </a:schemeClr>
+                          </a:solidFill>
+                        </a:rPr>
                         <a:t> = </a:t>
                       </a:r>
                       <a:r>
                         <a:rPr lang="fr-FR" sz="1300" b="0" i="1" kern="1200" dirty="0" err="1">
                           <a:solidFill>
-                            <a:schemeClr val="dk1"/>
+                            <a:schemeClr val="accent1">
+                              <a:lumMod val="75000"/>
+                            </a:schemeClr>
                           </a:solidFill>
                           <a:effectLst/>
                           <a:latin typeface="+mn-lt"/>
@@ -1764,7 +2102,9 @@
                       <a:r>
                         <a:rPr lang="fr-FR" sz="1300" b="0" i="1" kern="1200" dirty="0">
                           <a:solidFill>
-                            <a:schemeClr val="dk1"/>
+                            <a:schemeClr val="accent1">
+                              <a:lumMod val="75000"/>
+                            </a:schemeClr>
                           </a:solidFill>
                           <a:effectLst/>
                           <a:latin typeface="+mn-lt"/>
@@ -1776,7 +2116,9 @@
                       <a:r>
                         <a:rPr lang="fr-FR" sz="1300" b="0" i="1" kern="1200" dirty="0" err="1">
                           <a:solidFill>
-                            <a:schemeClr val="dk1"/>
+                            <a:schemeClr val="accent1">
+                              <a:lumMod val="75000"/>
+                            </a:schemeClr>
                           </a:solidFill>
                           <a:effectLst/>
                           <a:latin typeface="+mn-lt"/>
@@ -1787,7 +2129,9 @@
                       </a:r>
                       <a:endParaRPr lang="fr-FR" sz="1300" b="0" kern="1200" dirty="0">
                         <a:solidFill>
-                          <a:schemeClr val="dk1"/>
+                          <a:schemeClr val="accent1">
+                            <a:lumMod val="75000"/>
+                          </a:schemeClr>
                         </a:solidFill>
                         <a:effectLst/>
                         <a:latin typeface="+mn-lt"/>
@@ -1799,18 +2143,36 @@
                       <a:pPr>
                         <a:buNone/>
                       </a:pPr>
-                      <a:endParaRPr lang="fr-FR" sz="1300" dirty="0"/>
+                      <a:endParaRPr lang="fr-FR" sz="1300" dirty="0">
+                        <a:solidFill>
+                          <a:schemeClr val="accent1">
+                            <a:lumMod val="75000"/>
+                          </a:schemeClr>
+                        </a:solidFill>
+                      </a:endParaRPr>
                     </a:p>
                     <a:p>
                       <a:pPr>
                         <a:buNone/>
                       </a:pPr>
                       <a:r>
-                        <a:rPr lang="fr-FR" sz="1300" dirty="0" err="1"/>
+                        <a:rPr lang="fr-FR" sz="1300" dirty="0" err="1">
+                          <a:solidFill>
+                            <a:schemeClr val="accent1">
+                              <a:lumMod val="75000"/>
+                            </a:schemeClr>
+                          </a:solidFill>
+                        </a:rPr>
                         <a:t>PropertyGFAParking</a:t>
                       </a:r>
                       <a:r>
-                        <a:rPr lang="fr-FR" sz="1300" dirty="0"/>
+                        <a:rPr lang="fr-FR" sz="1300" dirty="0">
+                          <a:solidFill>
+                            <a:schemeClr val="accent1">
+                              <a:lumMod val="75000"/>
+                            </a:schemeClr>
+                          </a:solidFill>
+                        </a:rPr>
                         <a:t> ne consomme pas d’énergie</a:t>
                       </a:r>
                     </a:p>
@@ -1833,10 +2195,22 @@
                         <a:buNone/>
                       </a:pPr>
                       <a:r>
-                        <a:rPr lang="fr-FR" sz="1300" b="1"/>
+                        <a:rPr lang="fr-FR" sz="1300" b="1">
+                          <a:solidFill>
+                            <a:schemeClr val="accent1">
+                              <a:lumMod val="75000"/>
+                            </a:schemeClr>
+                          </a:solidFill>
+                        </a:rPr>
                         <a:t>Variables d’usage</a:t>
                       </a:r>
-                      <a:endParaRPr lang="fr-FR" sz="1300"/>
+                      <a:endParaRPr lang="fr-FR" sz="1300">
+                        <a:solidFill>
+                          <a:schemeClr val="accent1">
+                            <a:lumMod val="75000"/>
+                          </a:schemeClr>
+                        </a:solidFill>
+                      </a:endParaRPr>
                     </a:p>
                   </a:txBody>
                   <a:tcPr marL="64945" marR="64945" marT="32473" marB="32473" anchor="ctr"/>
@@ -1850,7 +2224,13 @@
                         <a:buNone/>
                       </a:pPr>
                       <a:r>
-                        <a:rPr lang="fr-FR" sz="1300"/>
+                        <a:rPr lang="fr-FR" sz="1300">
+                          <a:solidFill>
+                            <a:schemeClr val="accent1">
+                              <a:lumMod val="75000"/>
+                            </a:schemeClr>
+                          </a:solidFill>
+                        </a:rPr>
                         <a:t>PrimaryPropertyType, BuildingType, ListOfAllPropertyUseTypes, LargestPropertyUseType, LargestPropertyUseTypeGFA</a:t>
                       </a:r>
                     </a:p>
@@ -1866,7 +2246,13 @@
                         <a:buNone/>
                       </a:pPr>
                       <a:r>
-                        <a:rPr lang="fr-FR" sz="1300"/>
+                        <a:rPr lang="fr-FR" sz="1300">
+                          <a:solidFill>
+                            <a:schemeClr val="accent1">
+                              <a:lumMod val="75000"/>
+                            </a:schemeClr>
+                          </a:solidFill>
+                        </a:rPr>
                         <a:t>SecondLargest et ThirdLargest : peu de données</a:t>
                       </a:r>
                     </a:p>
@@ -1889,10 +2275,22 @@
                         <a:buNone/>
                       </a:pPr>
                       <a:r>
-                        <a:rPr lang="fr-FR" sz="1300" b="1"/>
+                        <a:rPr lang="fr-FR" sz="1300" b="1">
+                          <a:solidFill>
+                            <a:schemeClr val="accent1">
+                              <a:lumMod val="75000"/>
+                            </a:schemeClr>
+                          </a:solidFill>
+                        </a:rPr>
                         <a:t>Variables temporelles</a:t>
                       </a:r>
-                      <a:endParaRPr lang="fr-FR" sz="1300"/>
+                      <a:endParaRPr lang="fr-FR" sz="1300">
+                        <a:solidFill>
+                          <a:schemeClr val="accent1">
+                            <a:lumMod val="75000"/>
+                          </a:schemeClr>
+                        </a:solidFill>
+                      </a:endParaRPr>
                     </a:p>
                   </a:txBody>
                   <a:tcPr marL="64945" marR="64945" marT="32473" marB="32473" anchor="ctr"/>
@@ -1906,7 +2304,13 @@
                         <a:buNone/>
                       </a:pPr>
                       <a:r>
-                        <a:rPr lang="fr-FR" sz="1300"/>
+                        <a:rPr lang="fr-FR" sz="1300">
+                          <a:solidFill>
+                            <a:schemeClr val="accent1">
+                              <a:lumMod val="75000"/>
+                            </a:schemeClr>
+                          </a:solidFill>
+                        </a:rPr>
                         <a:t>YearBuilt</a:t>
                       </a:r>
                     </a:p>
@@ -1921,7 +2325,13 @@
                       <a:pPr>
                         <a:buNone/>
                       </a:pPr>
-                      <a:endParaRPr lang="fr-FR" sz="1300"/>
+                      <a:endParaRPr lang="fr-FR" sz="1300">
+                        <a:solidFill>
+                          <a:schemeClr val="accent1">
+                            <a:lumMod val="75000"/>
+                          </a:schemeClr>
+                        </a:solidFill>
+                      </a:endParaRPr>
                     </a:p>
                   </a:txBody>
                   <a:tcPr marL="64945" marR="64945" marT="32473" marB="32473" anchor="ctr"/>
@@ -1942,10 +2352,22 @@
                         <a:buNone/>
                       </a:pPr>
                       <a:r>
-                        <a:rPr lang="fr-FR" sz="1300" b="1"/>
+                        <a:rPr lang="fr-FR" sz="1300" b="1">
+                          <a:solidFill>
+                            <a:schemeClr val="accent1">
+                              <a:lumMod val="75000"/>
+                            </a:schemeClr>
+                          </a:solidFill>
+                        </a:rPr>
                         <a:t>Variables géographiques</a:t>
                       </a:r>
-                      <a:endParaRPr lang="fr-FR" sz="1300"/>
+                      <a:endParaRPr lang="fr-FR" sz="1300">
+                        <a:solidFill>
+                          <a:schemeClr val="accent1">
+                            <a:lumMod val="75000"/>
+                          </a:schemeClr>
+                        </a:solidFill>
+                      </a:endParaRPr>
                     </a:p>
                   </a:txBody>
                   <a:tcPr marL="64945" marR="64945" marT="32473" marB="32473" anchor="ctr"/>
@@ -1959,7 +2381,13 @@
                         <a:buNone/>
                       </a:pPr>
                       <a:r>
-                        <a:rPr lang="en-US" sz="1300"/>
+                        <a:rPr lang="en-US" sz="1300">
+                          <a:solidFill>
+                            <a:schemeClr val="accent1">
+                              <a:lumMod val="75000"/>
+                            </a:schemeClr>
+                          </a:solidFill>
+                        </a:rPr>
                         <a:t>Latitude, Longitude, Neighborhood, ZipCode, CouncilDistrictCode</a:t>
                       </a:r>
                     </a:p>
@@ -1974,7 +2402,13 @@
                       <a:pPr>
                         <a:buNone/>
                       </a:pPr>
-                      <a:endParaRPr lang="fr-FR" sz="1300"/>
+                      <a:endParaRPr lang="fr-FR" sz="1300" dirty="0">
+                        <a:solidFill>
+                          <a:schemeClr val="accent1">
+                            <a:lumMod val="75000"/>
+                          </a:schemeClr>
+                        </a:solidFill>
+                      </a:endParaRPr>
                     </a:p>
                   </a:txBody>
                   <a:tcPr marL="64945" marR="64945" marT="32473" marB="32473" anchor="ctr"/>
@@ -1995,10 +2429,22 @@
                         <a:buNone/>
                       </a:pPr>
                       <a:r>
-                        <a:rPr lang="fr-FR" sz="1300" b="1"/>
+                        <a:rPr lang="fr-FR" sz="1300" b="1">
+                          <a:solidFill>
+                            <a:schemeClr val="accent2">
+                              <a:lumMod val="75000"/>
+                            </a:schemeClr>
+                          </a:solidFill>
+                        </a:rPr>
                         <a:t>Colonnes cibles</a:t>
                       </a:r>
-                      <a:endParaRPr lang="fr-FR" sz="1300"/>
+                      <a:endParaRPr lang="fr-FR" sz="1300">
+                        <a:solidFill>
+                          <a:schemeClr val="accent2">
+                            <a:lumMod val="75000"/>
+                          </a:schemeClr>
+                        </a:solidFill>
+                      </a:endParaRPr>
                     </a:p>
                   </a:txBody>
                   <a:tcPr marL="64945" marR="64945" marT="32473" marB="32473" anchor="ctr"/>
@@ -2012,27 +2458,63 @@
                         <a:buNone/>
                       </a:pPr>
                       <a:r>
-                        <a:rPr lang="fr-FR" sz="1300" dirty="0" err="1"/>
+                        <a:rPr lang="fr-FR" sz="1300" dirty="0" err="1">
+                          <a:solidFill>
+                            <a:schemeClr val="accent2">
+                              <a:lumMod val="75000"/>
+                            </a:schemeClr>
+                          </a:solidFill>
+                        </a:rPr>
                         <a:t>TotalGHGEmissions</a:t>
                       </a:r>
                       <a:r>
-                        <a:rPr lang="fr-FR" sz="1300" dirty="0"/>
+                        <a:rPr lang="fr-FR" sz="1300" dirty="0">
+                          <a:solidFill>
+                            <a:schemeClr val="accent2">
+                              <a:lumMod val="75000"/>
+                            </a:schemeClr>
+                          </a:solidFill>
+                        </a:rPr>
                         <a:t>, </a:t>
                       </a:r>
                       <a:r>
-                        <a:rPr lang="fr-FR" sz="1300" dirty="0" err="1"/>
+                        <a:rPr lang="fr-FR" sz="1300" dirty="0" err="1">
+                          <a:solidFill>
+                            <a:schemeClr val="accent2">
+                              <a:lumMod val="75000"/>
+                            </a:schemeClr>
+                          </a:solidFill>
+                        </a:rPr>
                         <a:t>SiteEnergyUse</a:t>
                       </a:r>
                       <a:r>
-                        <a:rPr lang="fr-FR" sz="1300" dirty="0"/>
+                        <a:rPr lang="fr-FR" sz="1300" dirty="0">
+                          <a:solidFill>
+                            <a:schemeClr val="accent2">
+                              <a:lumMod val="75000"/>
+                            </a:schemeClr>
+                          </a:solidFill>
+                        </a:rPr>
                         <a:t>(</a:t>
                       </a:r>
                       <a:r>
-                        <a:rPr lang="fr-FR" sz="1300" dirty="0" err="1"/>
+                        <a:rPr lang="fr-FR" sz="1300" dirty="0" err="1">
+                          <a:solidFill>
+                            <a:schemeClr val="accent2">
+                              <a:lumMod val="75000"/>
+                            </a:schemeClr>
+                          </a:solidFill>
+                        </a:rPr>
                         <a:t>kBtu</a:t>
                       </a:r>
                       <a:r>
-                        <a:rPr lang="fr-FR" sz="1300" dirty="0"/>
+                        <a:rPr lang="fr-FR" sz="1300" dirty="0">
+                          <a:solidFill>
+                            <a:schemeClr val="accent2">
+                              <a:lumMod val="75000"/>
+                            </a:schemeClr>
+                          </a:solidFill>
+                        </a:rPr>
                         <a:t>)</a:t>
                       </a:r>
                     </a:p>
@@ -2068,10 +2550,18 @@
                         <a:buNone/>
                       </a:pPr>
                       <a:r>
-                        <a:rPr lang="fr-FR" sz="1300" b="1" dirty="0"/>
+                        <a:rPr lang="fr-FR" sz="1300" b="1" dirty="0">
+                          <a:solidFill>
+                            <a:srgbClr val="C00000"/>
+                          </a:solidFill>
+                        </a:rPr>
                         <a:t>Variables énergétiques</a:t>
                       </a:r>
-                      <a:endParaRPr lang="fr-FR" sz="1300" dirty="0"/>
+                      <a:endParaRPr lang="fr-FR" sz="1300" dirty="0">
+                        <a:solidFill>
+                          <a:srgbClr val="C00000"/>
+                        </a:solidFill>
+                      </a:endParaRPr>
                     </a:p>
                   </a:txBody>
                   <a:tcPr marL="64945" marR="64945" marT="32473" marB="32473" anchor="ctr"/>
@@ -2085,7 +2575,11 @@
                         <a:buNone/>
                       </a:pPr>
                       <a:r>
-                        <a:rPr lang="fr-FR" sz="1300"/>
+                        <a:rPr lang="fr-FR" sz="1300">
+                          <a:solidFill>
+                            <a:srgbClr val="C00000"/>
+                          </a:solidFill>
+                        </a:rPr>
                         <a:t>SiteEUI(kBtu/sf), SourceEUI(kBtu/sf), Electricity(kWh), NaturalGas(therms), etc.</a:t>
                       </a:r>
                     </a:p>
@@ -2101,14 +2595,26 @@
                         <a:buNone/>
                       </a:pPr>
                       <a:r>
-                        <a:rPr lang="fr-FR" sz="1300" dirty="0"/>
+                        <a:rPr lang="fr-FR" sz="1300" dirty="0">
+                          <a:solidFill>
+                            <a:srgbClr val="C00000"/>
+                          </a:solidFill>
+                        </a:rPr>
                         <a:t>Directement liées aux cibles, risque de data </a:t>
                       </a:r>
                       <a:r>
-                        <a:rPr lang="fr-FR" sz="1300" dirty="0" err="1"/>
+                        <a:rPr lang="fr-FR" sz="1300" dirty="0" err="1">
+                          <a:solidFill>
+                            <a:srgbClr val="C00000"/>
+                          </a:solidFill>
+                        </a:rPr>
                         <a:t>leakage</a:t>
                       </a:r>
-                      <a:endParaRPr lang="fr-FR" sz="1300" dirty="0"/>
+                      <a:endParaRPr lang="fr-FR" sz="1300" dirty="0">
+                        <a:solidFill>
+                          <a:srgbClr val="C00000"/>
+                        </a:solidFill>
+                      </a:endParaRPr>
                     </a:p>
                   </a:txBody>
                   <a:tcPr marL="64945" marR="64945" marT="32473" marB="32473" anchor="ctr"/>
@@ -2320,6 +2826,203 @@
   <p:clrMapOvr>
     <a:masterClrMapping/>
   </p:clrMapOvr>
+  <p:timing>
+    <p:tnLst>
+      <p:par>
+        <p:cTn id="1" dur="indefinite" restart="never" nodeType="tmRoot">
+          <p:childTnLst>
+            <p:seq concurrent="1" nextAc="seek">
+              <p:cTn id="2" dur="indefinite" nodeType="mainSeq">
+                <p:childTnLst>
+                  <p:par>
+                    <p:cTn id="3" fill="hold">
+                      <p:stCondLst>
+                        <p:cond delay="indefinite"/>
+                      </p:stCondLst>
+                      <p:childTnLst>
+                        <p:par>
+                          <p:cTn id="4" fill="hold">
+                            <p:stCondLst>
+                              <p:cond delay="0"/>
+                            </p:stCondLst>
+                            <p:childTnLst>
+                              <p:par>
+                                <p:cTn id="5" presetID="2" presetClass="entr" presetSubtype="4" fill="hold" nodeType="clickEffect">
+                                  <p:stCondLst>
+                                    <p:cond delay="0"/>
+                                  </p:stCondLst>
+                                  <p:childTnLst>
+                                    <p:set>
+                                      <p:cBhvr>
+                                        <p:cTn id="6" dur="1" fill="hold">
+                                          <p:stCondLst>
+                                            <p:cond delay="0"/>
+                                          </p:stCondLst>
+                                        </p:cTn>
+                                        <p:tgtEl>
+                                          <p:spTgt spid="5"/>
+                                        </p:tgtEl>
+                                        <p:attrNameLst>
+                                          <p:attrName>style.visibility</p:attrName>
+                                        </p:attrNameLst>
+                                      </p:cBhvr>
+                                      <p:to>
+                                        <p:strVal val="visible"/>
+                                      </p:to>
+                                    </p:set>
+                                    <p:anim calcmode="lin" valueType="num">
+                                      <p:cBhvr additive="base">
+                                        <p:cTn id="7" dur="500" fill="hold"/>
+                                        <p:tgtEl>
+                                          <p:spTgt spid="5"/>
+                                        </p:tgtEl>
+                                        <p:attrNameLst>
+                                          <p:attrName>ppt_x</p:attrName>
+                                        </p:attrNameLst>
+                                      </p:cBhvr>
+                                      <p:tavLst>
+                                        <p:tav tm="0">
+                                          <p:val>
+                                            <p:strVal val="#ppt_x"/>
+                                          </p:val>
+                                        </p:tav>
+                                        <p:tav tm="100000">
+                                          <p:val>
+                                            <p:strVal val="#ppt_x"/>
+                                          </p:val>
+                                        </p:tav>
+                                      </p:tavLst>
+                                    </p:anim>
+                                    <p:anim calcmode="lin" valueType="num">
+                                      <p:cBhvr additive="base">
+                                        <p:cTn id="8" dur="500" fill="hold"/>
+                                        <p:tgtEl>
+                                          <p:spTgt spid="5"/>
+                                        </p:tgtEl>
+                                        <p:attrNameLst>
+                                          <p:attrName>ppt_y</p:attrName>
+                                        </p:attrNameLst>
+                                      </p:cBhvr>
+                                      <p:tavLst>
+                                        <p:tav tm="0">
+                                          <p:val>
+                                            <p:strVal val="1+#ppt_h/2"/>
+                                          </p:val>
+                                        </p:tav>
+                                        <p:tav tm="100000">
+                                          <p:val>
+                                            <p:strVal val="#ppt_y"/>
+                                          </p:val>
+                                        </p:tav>
+                                      </p:tavLst>
+                                    </p:anim>
+                                  </p:childTnLst>
+                                </p:cTn>
+                              </p:par>
+                              <p:par>
+                                <p:cTn id="9" presetID="2" presetClass="entr" presetSubtype="4" fill="hold" grpId="0" nodeType="withEffect">
+                                  <p:stCondLst>
+                                    <p:cond delay="0"/>
+                                  </p:stCondLst>
+                                  <p:childTnLst>
+                                    <p:set>
+                                      <p:cBhvr>
+                                        <p:cTn id="10" dur="1" fill="hold">
+                                          <p:stCondLst>
+                                            <p:cond delay="0"/>
+                                          </p:stCondLst>
+                                        </p:cTn>
+                                        <p:tgtEl>
+                                          <p:spTgt spid="6"/>
+                                        </p:tgtEl>
+                                        <p:attrNameLst>
+                                          <p:attrName>style.visibility</p:attrName>
+                                        </p:attrNameLst>
+                                      </p:cBhvr>
+                                      <p:to>
+                                        <p:strVal val="visible"/>
+                                      </p:to>
+                                    </p:set>
+                                    <p:anim calcmode="lin" valueType="num">
+                                      <p:cBhvr additive="base">
+                                        <p:cTn id="11" dur="500" fill="hold"/>
+                                        <p:tgtEl>
+                                          <p:spTgt spid="6"/>
+                                        </p:tgtEl>
+                                        <p:attrNameLst>
+                                          <p:attrName>ppt_x</p:attrName>
+                                        </p:attrNameLst>
+                                      </p:cBhvr>
+                                      <p:tavLst>
+                                        <p:tav tm="0">
+                                          <p:val>
+                                            <p:strVal val="#ppt_x"/>
+                                          </p:val>
+                                        </p:tav>
+                                        <p:tav tm="100000">
+                                          <p:val>
+                                            <p:strVal val="#ppt_x"/>
+                                          </p:val>
+                                        </p:tav>
+                                      </p:tavLst>
+                                    </p:anim>
+                                    <p:anim calcmode="lin" valueType="num">
+                                      <p:cBhvr additive="base">
+                                        <p:cTn id="12" dur="500" fill="hold"/>
+                                        <p:tgtEl>
+                                          <p:spTgt spid="6"/>
+                                        </p:tgtEl>
+                                        <p:attrNameLst>
+                                          <p:attrName>ppt_y</p:attrName>
+                                        </p:attrNameLst>
+                                      </p:cBhvr>
+                                      <p:tavLst>
+                                        <p:tav tm="0">
+                                          <p:val>
+                                            <p:strVal val="1+#ppt_h/2"/>
+                                          </p:val>
+                                        </p:tav>
+                                        <p:tav tm="100000">
+                                          <p:val>
+                                            <p:strVal val="#ppt_y"/>
+                                          </p:val>
+                                        </p:tav>
+                                      </p:tavLst>
+                                    </p:anim>
+                                  </p:childTnLst>
+                                </p:cTn>
+                              </p:par>
+                            </p:childTnLst>
+                          </p:cTn>
+                        </p:par>
+                      </p:childTnLst>
+                    </p:cTn>
+                  </p:par>
+                </p:childTnLst>
+              </p:cTn>
+              <p:prevCondLst>
+                <p:cond evt="onPrev" delay="0">
+                  <p:tgtEl>
+                    <p:sldTgt/>
+                  </p:tgtEl>
+                </p:cond>
+              </p:prevCondLst>
+              <p:nextCondLst>
+                <p:cond evt="onNext" delay="0">
+                  <p:tgtEl>
+                    <p:sldTgt/>
+                  </p:tgtEl>
+                </p:cond>
+              </p:nextCondLst>
+            </p:seq>
+          </p:childTnLst>
+        </p:cTn>
+      </p:par>
+    </p:tnLst>
+    <p:bldLst>
+      <p:bldP spid="6" grpId="0"/>
+    </p:bldLst>
+  </p:timing>
 </p:sld>
 </file>
 
@@ -4429,7 +5132,7 @@
                             </p:stCondLst>
                             <p:childTnLst>
                               <p:par>
-                                <p:cTn id="5" presetID="1" presetClass="entr" presetSubtype="0" fill="hold" grpId="0" nodeType="clickEffect">
+                                <p:cTn id="5" presetID="10" presetClass="entr" presetSubtype="0" fill="hold" grpId="0" nodeType="clickEffect">
                                   <p:stCondLst>
                                     <p:cond delay="0"/>
                                   </p:stCondLst>
@@ -4442,7 +5145,7 @@
                                           </p:stCondLst>
                                         </p:cTn>
                                         <p:tgtEl>
-                                          <p:spTgt spid="4"/>
+                                          <p:spTgt spid="3"/>
                                         </p:tgtEl>
                                         <p:attrNameLst>
                                           <p:attrName>style.visibility</p:attrName>
@@ -4452,6 +5155,14 @@
                                         <p:strVal val="visible"/>
                                       </p:to>
                                     </p:set>
+                                    <p:animEffect transition="in" filter="fade">
+                                      <p:cBhvr>
+                                        <p:cTn id="7" dur="500"/>
+                                        <p:tgtEl>
+                                          <p:spTgt spid="3"/>
+                                        </p:tgtEl>
+                                      </p:cBhvr>
+                                    </p:animEffect>
                                   </p:childTnLst>
                                 </p:cTn>
                               </p:par>
@@ -4462,32 +5173,32 @@
                     </p:cTn>
                   </p:par>
                   <p:par>
-                    <p:cTn id="7" fill="hold">
+                    <p:cTn id="8" fill="hold">
                       <p:stCondLst>
                         <p:cond delay="indefinite"/>
                       </p:stCondLst>
                       <p:childTnLst>
                         <p:par>
-                          <p:cTn id="8" fill="hold">
+                          <p:cTn id="9" fill="hold">
                             <p:stCondLst>
                               <p:cond delay="0"/>
                             </p:stCondLst>
                             <p:childTnLst>
                               <p:par>
-                                <p:cTn id="9" presetID="1" presetClass="entr" presetSubtype="0" fill="hold" grpId="0" nodeType="clickEffect">
+                                <p:cTn id="10" presetID="14" presetClass="entr" presetSubtype="10" fill="hold" grpId="0" nodeType="clickEffect">
                                   <p:stCondLst>
                                     <p:cond delay="0"/>
                                   </p:stCondLst>
                                   <p:childTnLst>
                                     <p:set>
                                       <p:cBhvr>
-                                        <p:cTn id="10" dur="1" fill="hold">
+                                        <p:cTn id="11" dur="1" fill="hold">
                                           <p:stCondLst>
                                             <p:cond delay="0"/>
                                           </p:stCondLst>
                                         </p:cTn>
                                         <p:tgtEl>
-                                          <p:spTgt spid="6"/>
+                                          <p:spTgt spid="4"/>
                                         </p:tgtEl>
                                         <p:attrNameLst>
                                           <p:attrName>style.visibility</p:attrName>
@@ -4497,6 +5208,14 @@
                                         <p:strVal val="visible"/>
                                       </p:to>
                                     </p:set>
+                                    <p:animEffect transition="in" filter="randombar(horizontal)">
+                                      <p:cBhvr>
+                                        <p:cTn id="12" dur="500"/>
+                                        <p:tgtEl>
+                                          <p:spTgt spid="4"/>
+                                        </p:tgtEl>
+                                      </p:cBhvr>
+                                    </p:animEffect>
                                   </p:childTnLst>
                                 </p:cTn>
                               </p:par>
@@ -4507,32 +5226,32 @@
                     </p:cTn>
                   </p:par>
                   <p:par>
-                    <p:cTn id="11" fill="hold">
+                    <p:cTn id="13" fill="hold">
                       <p:stCondLst>
                         <p:cond delay="indefinite"/>
                       </p:stCondLst>
                       <p:childTnLst>
                         <p:par>
-                          <p:cTn id="12" fill="hold">
+                          <p:cTn id="14" fill="hold">
                             <p:stCondLst>
                               <p:cond delay="0"/>
                             </p:stCondLst>
                             <p:childTnLst>
                               <p:par>
-                                <p:cTn id="13" presetID="1" presetClass="entr" presetSubtype="0" fill="hold" grpId="0" nodeType="clickEffect">
+                                <p:cTn id="15" presetID="10" presetClass="entr" presetSubtype="0" fill="hold" grpId="0" nodeType="clickEffect">
                                   <p:stCondLst>
                                     <p:cond delay="0"/>
                                   </p:stCondLst>
                                   <p:childTnLst>
                                     <p:set>
                                       <p:cBhvr>
-                                        <p:cTn id="14" dur="1" fill="hold">
+                                        <p:cTn id="16" dur="1" fill="hold">
                                           <p:stCondLst>
                                             <p:cond delay="0"/>
                                           </p:stCondLst>
                                         </p:cTn>
                                         <p:tgtEl>
-                                          <p:spTgt spid="13"/>
+                                          <p:spTgt spid="5"/>
                                         </p:tgtEl>
                                         <p:attrNameLst>
                                           <p:attrName>style.visibility</p:attrName>
@@ -4542,6 +5261,14 @@
                                         <p:strVal val="visible"/>
                                       </p:to>
                                     </p:set>
+                                    <p:animEffect transition="in" filter="fade">
+                                      <p:cBhvr>
+                                        <p:cTn id="17" dur="500"/>
+                                        <p:tgtEl>
+                                          <p:spTgt spid="5"/>
+                                        </p:tgtEl>
+                                      </p:cBhvr>
+                                    </p:animEffect>
                                   </p:childTnLst>
                                 </p:cTn>
                               </p:par>
@@ -4552,32 +5279,32 @@
                     </p:cTn>
                   </p:par>
                   <p:par>
-                    <p:cTn id="15" fill="hold">
+                    <p:cTn id="18" fill="hold">
                       <p:stCondLst>
                         <p:cond delay="indefinite"/>
                       </p:stCondLst>
                       <p:childTnLst>
                         <p:par>
-                          <p:cTn id="16" fill="hold">
+                          <p:cTn id="19" fill="hold">
                             <p:stCondLst>
                               <p:cond delay="0"/>
                             </p:stCondLst>
                             <p:childTnLst>
                               <p:par>
-                                <p:cTn id="17" presetID="1" presetClass="entr" presetSubtype="0" fill="hold" grpId="0" nodeType="clickEffect">
+                                <p:cTn id="20" presetID="14" presetClass="entr" presetSubtype="10" fill="hold" grpId="0" nodeType="clickEffect">
                                   <p:stCondLst>
                                     <p:cond delay="0"/>
                                   </p:stCondLst>
                                   <p:childTnLst>
                                     <p:set>
                                       <p:cBhvr>
-                                        <p:cTn id="18" dur="1" fill="hold">
+                                        <p:cTn id="21" dur="1" fill="hold">
                                           <p:stCondLst>
                                             <p:cond delay="0"/>
                                           </p:stCondLst>
                                         </p:cTn>
                                         <p:tgtEl>
-                                          <p:spTgt spid="15"/>
+                                          <p:spTgt spid="6"/>
                                         </p:tgtEl>
                                         <p:attrNameLst>
                                           <p:attrName>style.visibility</p:attrName>
@@ -4587,6 +5314,14 @@
                                         <p:strVal val="visible"/>
                                       </p:to>
                                     </p:set>
+                                    <p:animEffect transition="in" filter="randombar(horizontal)">
+                                      <p:cBhvr>
+                                        <p:cTn id="22" dur="500"/>
+                                        <p:tgtEl>
+                                          <p:spTgt spid="6"/>
+                                        </p:tgtEl>
+                                      </p:cBhvr>
+                                    </p:animEffect>
                                   </p:childTnLst>
                                 </p:cTn>
                               </p:par>
@@ -4597,32 +5332,32 @@
                     </p:cTn>
                   </p:par>
                   <p:par>
-                    <p:cTn id="19" fill="hold">
+                    <p:cTn id="23" fill="hold">
                       <p:stCondLst>
                         <p:cond delay="indefinite"/>
                       </p:stCondLst>
                       <p:childTnLst>
                         <p:par>
-                          <p:cTn id="20" fill="hold">
+                          <p:cTn id="24" fill="hold">
                             <p:stCondLst>
                               <p:cond delay="0"/>
                             </p:stCondLst>
                             <p:childTnLst>
                               <p:par>
-                                <p:cTn id="21" presetID="1" presetClass="entr" presetSubtype="0" fill="hold" grpId="0" nodeType="clickEffect">
+                                <p:cTn id="25" presetID="10" presetClass="entr" presetSubtype="0" fill="hold" grpId="0" nodeType="clickEffect">
                                   <p:stCondLst>
                                     <p:cond delay="0"/>
                                   </p:stCondLst>
                                   <p:childTnLst>
                                     <p:set>
                                       <p:cBhvr>
-                                        <p:cTn id="22" dur="1" fill="hold">
+                                        <p:cTn id="26" dur="1" fill="hold">
                                           <p:stCondLst>
                                             <p:cond delay="0"/>
                                           </p:stCondLst>
                                         </p:cTn>
                                         <p:tgtEl>
-                                          <p:spTgt spid="19"/>
+                                          <p:spTgt spid="7"/>
                                         </p:tgtEl>
                                         <p:attrNameLst>
                                           <p:attrName>style.visibility</p:attrName>
@@ -4632,6 +5367,614 @@
                                         <p:strVal val="visible"/>
                                       </p:to>
                                     </p:set>
+                                    <p:animEffect transition="in" filter="fade">
+                                      <p:cBhvr>
+                                        <p:cTn id="27" dur="500"/>
+                                        <p:tgtEl>
+                                          <p:spTgt spid="7"/>
+                                        </p:tgtEl>
+                                      </p:cBhvr>
+                                    </p:animEffect>
+                                  </p:childTnLst>
+                                </p:cTn>
+                              </p:par>
+                            </p:childTnLst>
+                          </p:cTn>
+                        </p:par>
+                      </p:childTnLst>
+                    </p:cTn>
+                  </p:par>
+                  <p:par>
+                    <p:cTn id="28" fill="hold">
+                      <p:stCondLst>
+                        <p:cond delay="indefinite"/>
+                      </p:stCondLst>
+                      <p:childTnLst>
+                        <p:par>
+                          <p:cTn id="29" fill="hold">
+                            <p:stCondLst>
+                              <p:cond delay="0"/>
+                            </p:stCondLst>
+                            <p:childTnLst>
+                              <p:par>
+                                <p:cTn id="30" presetID="14" presetClass="entr" presetSubtype="10" fill="hold" grpId="0" nodeType="clickEffect">
+                                  <p:stCondLst>
+                                    <p:cond delay="0"/>
+                                  </p:stCondLst>
+                                  <p:childTnLst>
+                                    <p:set>
+                                      <p:cBhvr>
+                                        <p:cTn id="31" dur="1" fill="hold">
+                                          <p:stCondLst>
+                                            <p:cond delay="0"/>
+                                          </p:stCondLst>
+                                        </p:cTn>
+                                        <p:tgtEl>
+                                          <p:spTgt spid="9"/>
+                                        </p:tgtEl>
+                                        <p:attrNameLst>
+                                          <p:attrName>style.visibility</p:attrName>
+                                        </p:attrNameLst>
+                                      </p:cBhvr>
+                                      <p:to>
+                                        <p:strVal val="visible"/>
+                                      </p:to>
+                                    </p:set>
+                                    <p:animEffect transition="in" filter="randombar(horizontal)">
+                                      <p:cBhvr>
+                                        <p:cTn id="32" dur="500"/>
+                                        <p:tgtEl>
+                                          <p:spTgt spid="9"/>
+                                        </p:tgtEl>
+                                      </p:cBhvr>
+                                    </p:animEffect>
+                                  </p:childTnLst>
+                                </p:cTn>
+                              </p:par>
+                              <p:par>
+                                <p:cTn id="33" presetID="14" presetClass="entr" presetSubtype="10" fill="hold" grpId="0" nodeType="withEffect">
+                                  <p:stCondLst>
+                                    <p:cond delay="0"/>
+                                  </p:stCondLst>
+                                  <p:childTnLst>
+                                    <p:set>
+                                      <p:cBhvr>
+                                        <p:cTn id="34" dur="1" fill="hold">
+                                          <p:stCondLst>
+                                            <p:cond delay="0"/>
+                                          </p:stCondLst>
+                                        </p:cTn>
+                                        <p:tgtEl>
+                                          <p:spTgt spid="8"/>
+                                        </p:tgtEl>
+                                        <p:attrNameLst>
+                                          <p:attrName>style.visibility</p:attrName>
+                                        </p:attrNameLst>
+                                      </p:cBhvr>
+                                      <p:to>
+                                        <p:strVal val="visible"/>
+                                      </p:to>
+                                    </p:set>
+                                    <p:animEffect transition="in" filter="randombar(horizontal)">
+                                      <p:cBhvr>
+                                        <p:cTn id="35" dur="500"/>
+                                        <p:tgtEl>
+                                          <p:spTgt spid="8"/>
+                                        </p:tgtEl>
+                                      </p:cBhvr>
+                                    </p:animEffect>
+                                  </p:childTnLst>
+                                </p:cTn>
+                              </p:par>
+                            </p:childTnLst>
+                          </p:cTn>
+                        </p:par>
+                      </p:childTnLst>
+                    </p:cTn>
+                  </p:par>
+                  <p:par>
+                    <p:cTn id="36" fill="hold">
+                      <p:stCondLst>
+                        <p:cond delay="indefinite"/>
+                      </p:stCondLst>
+                      <p:childTnLst>
+                        <p:par>
+                          <p:cTn id="37" fill="hold">
+                            <p:stCondLst>
+                              <p:cond delay="0"/>
+                            </p:stCondLst>
+                            <p:childTnLst>
+                              <p:par>
+                                <p:cTn id="38" presetID="10" presetClass="entr" presetSubtype="0" fill="hold" grpId="0" nodeType="clickEffect">
+                                  <p:stCondLst>
+                                    <p:cond delay="0"/>
+                                  </p:stCondLst>
+                                  <p:childTnLst>
+                                    <p:set>
+                                      <p:cBhvr>
+                                        <p:cTn id="39" dur="1" fill="hold">
+                                          <p:stCondLst>
+                                            <p:cond delay="0"/>
+                                          </p:stCondLst>
+                                        </p:cTn>
+                                        <p:tgtEl>
+                                          <p:spTgt spid="10"/>
+                                        </p:tgtEl>
+                                        <p:attrNameLst>
+                                          <p:attrName>style.visibility</p:attrName>
+                                        </p:attrNameLst>
+                                      </p:cBhvr>
+                                      <p:to>
+                                        <p:strVal val="visible"/>
+                                      </p:to>
+                                    </p:set>
+                                    <p:animEffect transition="in" filter="fade">
+                                      <p:cBhvr>
+                                        <p:cTn id="40" dur="500"/>
+                                        <p:tgtEl>
+                                          <p:spTgt spid="10"/>
+                                        </p:tgtEl>
+                                      </p:cBhvr>
+                                    </p:animEffect>
+                                  </p:childTnLst>
+                                </p:cTn>
+                              </p:par>
+                            </p:childTnLst>
+                          </p:cTn>
+                        </p:par>
+                      </p:childTnLst>
+                    </p:cTn>
+                  </p:par>
+                  <p:par>
+                    <p:cTn id="41" fill="hold">
+                      <p:stCondLst>
+                        <p:cond delay="indefinite"/>
+                      </p:stCondLst>
+                      <p:childTnLst>
+                        <p:par>
+                          <p:cTn id="42" fill="hold">
+                            <p:stCondLst>
+                              <p:cond delay="0"/>
+                            </p:stCondLst>
+                            <p:childTnLst>
+                              <p:par>
+                                <p:cTn id="43" presetID="14" presetClass="entr" presetSubtype="10" fill="hold" grpId="0" nodeType="clickEffect">
+                                  <p:stCondLst>
+                                    <p:cond delay="0"/>
+                                  </p:stCondLst>
+                                  <p:childTnLst>
+                                    <p:set>
+                                      <p:cBhvr>
+                                        <p:cTn id="44" dur="1" fill="hold">
+                                          <p:stCondLst>
+                                            <p:cond delay="0"/>
+                                          </p:stCondLst>
+                                        </p:cTn>
+                                        <p:tgtEl>
+                                          <p:spTgt spid="13"/>
+                                        </p:tgtEl>
+                                        <p:attrNameLst>
+                                          <p:attrName>style.visibility</p:attrName>
+                                        </p:attrNameLst>
+                                      </p:cBhvr>
+                                      <p:to>
+                                        <p:strVal val="visible"/>
+                                      </p:to>
+                                    </p:set>
+                                    <p:animEffect transition="in" filter="randombar(horizontal)">
+                                      <p:cBhvr>
+                                        <p:cTn id="45" dur="500"/>
+                                        <p:tgtEl>
+                                          <p:spTgt spid="13"/>
+                                        </p:tgtEl>
+                                      </p:cBhvr>
+                                    </p:animEffect>
+                                  </p:childTnLst>
+                                </p:cTn>
+                              </p:par>
+                            </p:childTnLst>
+                          </p:cTn>
+                        </p:par>
+                      </p:childTnLst>
+                    </p:cTn>
+                  </p:par>
+                  <p:par>
+                    <p:cTn id="46" fill="hold">
+                      <p:stCondLst>
+                        <p:cond delay="indefinite"/>
+                      </p:stCondLst>
+                      <p:childTnLst>
+                        <p:par>
+                          <p:cTn id="47" fill="hold">
+                            <p:stCondLst>
+                              <p:cond delay="0"/>
+                            </p:stCondLst>
+                            <p:childTnLst>
+                              <p:par>
+                                <p:cTn id="48" presetID="10" presetClass="entr" presetSubtype="0" fill="hold" grpId="0" nodeType="clickEffect">
+                                  <p:stCondLst>
+                                    <p:cond delay="0"/>
+                                  </p:stCondLst>
+                                  <p:childTnLst>
+                                    <p:set>
+                                      <p:cBhvr>
+                                        <p:cTn id="49" dur="1" fill="hold">
+                                          <p:stCondLst>
+                                            <p:cond delay="0"/>
+                                          </p:stCondLst>
+                                        </p:cTn>
+                                        <p:tgtEl>
+                                          <p:spTgt spid="14"/>
+                                        </p:tgtEl>
+                                        <p:attrNameLst>
+                                          <p:attrName>style.visibility</p:attrName>
+                                        </p:attrNameLst>
+                                      </p:cBhvr>
+                                      <p:to>
+                                        <p:strVal val="visible"/>
+                                      </p:to>
+                                    </p:set>
+                                    <p:animEffect transition="in" filter="fade">
+                                      <p:cBhvr>
+                                        <p:cTn id="50" dur="500"/>
+                                        <p:tgtEl>
+                                          <p:spTgt spid="14"/>
+                                        </p:tgtEl>
+                                      </p:cBhvr>
+                                    </p:animEffect>
+                                  </p:childTnLst>
+                                </p:cTn>
+                              </p:par>
+                            </p:childTnLst>
+                          </p:cTn>
+                        </p:par>
+                      </p:childTnLst>
+                    </p:cTn>
+                  </p:par>
+                  <p:par>
+                    <p:cTn id="51" fill="hold">
+                      <p:stCondLst>
+                        <p:cond delay="indefinite"/>
+                      </p:stCondLst>
+                      <p:childTnLst>
+                        <p:par>
+                          <p:cTn id="52" fill="hold">
+                            <p:stCondLst>
+                              <p:cond delay="0"/>
+                            </p:stCondLst>
+                            <p:childTnLst>
+                              <p:par>
+                                <p:cTn id="53" presetID="14" presetClass="entr" presetSubtype="10" fill="hold" grpId="0" nodeType="clickEffect">
+                                  <p:stCondLst>
+                                    <p:cond delay="0"/>
+                                  </p:stCondLst>
+                                  <p:childTnLst>
+                                    <p:set>
+                                      <p:cBhvr>
+                                        <p:cTn id="54" dur="1" fill="hold">
+                                          <p:stCondLst>
+                                            <p:cond delay="0"/>
+                                          </p:stCondLst>
+                                        </p:cTn>
+                                        <p:tgtEl>
+                                          <p:spTgt spid="15"/>
+                                        </p:tgtEl>
+                                        <p:attrNameLst>
+                                          <p:attrName>style.visibility</p:attrName>
+                                        </p:attrNameLst>
+                                      </p:cBhvr>
+                                      <p:to>
+                                        <p:strVal val="visible"/>
+                                      </p:to>
+                                    </p:set>
+                                    <p:animEffect transition="in" filter="randombar(horizontal)">
+                                      <p:cBhvr>
+                                        <p:cTn id="55" dur="500"/>
+                                        <p:tgtEl>
+                                          <p:spTgt spid="15"/>
+                                        </p:tgtEl>
+                                      </p:cBhvr>
+                                    </p:animEffect>
+                                  </p:childTnLst>
+                                </p:cTn>
+                              </p:par>
+                            </p:childTnLst>
+                          </p:cTn>
+                        </p:par>
+                      </p:childTnLst>
+                    </p:cTn>
+                  </p:par>
+                  <p:par>
+                    <p:cTn id="56" fill="hold">
+                      <p:stCondLst>
+                        <p:cond delay="indefinite"/>
+                      </p:stCondLst>
+                      <p:childTnLst>
+                        <p:par>
+                          <p:cTn id="57" fill="hold">
+                            <p:stCondLst>
+                              <p:cond delay="0"/>
+                            </p:stCondLst>
+                            <p:childTnLst>
+                              <p:par>
+                                <p:cTn id="58" presetID="10" presetClass="entr" presetSubtype="0" fill="hold" grpId="0" nodeType="clickEffect">
+                                  <p:stCondLst>
+                                    <p:cond delay="0"/>
+                                  </p:stCondLst>
+                                  <p:childTnLst>
+                                    <p:set>
+                                      <p:cBhvr>
+                                        <p:cTn id="59" dur="1" fill="hold">
+                                          <p:stCondLst>
+                                            <p:cond delay="0"/>
+                                          </p:stCondLst>
+                                        </p:cTn>
+                                        <p:tgtEl>
+                                          <p:spTgt spid="11"/>
+                                        </p:tgtEl>
+                                        <p:attrNameLst>
+                                          <p:attrName>style.visibility</p:attrName>
+                                        </p:attrNameLst>
+                                      </p:cBhvr>
+                                      <p:to>
+                                        <p:strVal val="visible"/>
+                                      </p:to>
+                                    </p:set>
+                                    <p:animEffect transition="in" filter="fade">
+                                      <p:cBhvr>
+                                        <p:cTn id="60" dur="500"/>
+                                        <p:tgtEl>
+                                          <p:spTgt spid="11"/>
+                                        </p:tgtEl>
+                                      </p:cBhvr>
+                                    </p:animEffect>
+                                  </p:childTnLst>
+                                </p:cTn>
+                              </p:par>
+                            </p:childTnLst>
+                          </p:cTn>
+                        </p:par>
+                      </p:childTnLst>
+                    </p:cTn>
+                  </p:par>
+                  <p:par>
+                    <p:cTn id="61" fill="hold">
+                      <p:stCondLst>
+                        <p:cond delay="indefinite"/>
+                      </p:stCondLst>
+                      <p:childTnLst>
+                        <p:par>
+                          <p:cTn id="62" fill="hold">
+                            <p:stCondLst>
+                              <p:cond delay="0"/>
+                            </p:stCondLst>
+                            <p:childTnLst>
+                              <p:par>
+                                <p:cTn id="63" presetID="14" presetClass="entr" presetSubtype="10" fill="hold" grpId="0" nodeType="clickEffect">
+                                  <p:stCondLst>
+                                    <p:cond delay="0"/>
+                                  </p:stCondLst>
+                                  <p:childTnLst>
+                                    <p:set>
+                                      <p:cBhvr>
+                                        <p:cTn id="64" dur="1" fill="hold">
+                                          <p:stCondLst>
+                                            <p:cond delay="0"/>
+                                          </p:stCondLst>
+                                        </p:cTn>
+                                        <p:tgtEl>
+                                          <p:spTgt spid="18"/>
+                                        </p:tgtEl>
+                                        <p:attrNameLst>
+                                          <p:attrName>style.visibility</p:attrName>
+                                        </p:attrNameLst>
+                                      </p:cBhvr>
+                                      <p:to>
+                                        <p:strVal val="visible"/>
+                                      </p:to>
+                                    </p:set>
+                                    <p:animEffect transition="in" filter="randombar(horizontal)">
+                                      <p:cBhvr>
+                                        <p:cTn id="65" dur="500"/>
+                                        <p:tgtEl>
+                                          <p:spTgt spid="18"/>
+                                        </p:tgtEl>
+                                      </p:cBhvr>
+                                    </p:animEffect>
+                                  </p:childTnLst>
+                                </p:cTn>
+                              </p:par>
+                              <p:par>
+                                <p:cTn id="66" presetID="14" presetClass="entr" presetSubtype="10" fill="hold" grpId="0" nodeType="withEffect">
+                                  <p:stCondLst>
+                                    <p:cond delay="0"/>
+                                  </p:stCondLst>
+                                  <p:childTnLst>
+                                    <p:set>
+                                      <p:cBhvr>
+                                        <p:cTn id="67" dur="1" fill="hold">
+                                          <p:stCondLst>
+                                            <p:cond delay="0"/>
+                                          </p:stCondLst>
+                                        </p:cTn>
+                                        <p:tgtEl>
+                                          <p:spTgt spid="17"/>
+                                        </p:tgtEl>
+                                        <p:attrNameLst>
+                                          <p:attrName>style.visibility</p:attrName>
+                                        </p:attrNameLst>
+                                      </p:cBhvr>
+                                      <p:to>
+                                        <p:strVal val="visible"/>
+                                      </p:to>
+                                    </p:set>
+                                    <p:animEffect transition="in" filter="randombar(horizontal)">
+                                      <p:cBhvr>
+                                        <p:cTn id="68" dur="500"/>
+                                        <p:tgtEl>
+                                          <p:spTgt spid="17"/>
+                                        </p:tgtEl>
+                                      </p:cBhvr>
+                                    </p:animEffect>
+                                  </p:childTnLst>
+                                </p:cTn>
+                              </p:par>
+                            </p:childTnLst>
+                          </p:cTn>
+                        </p:par>
+                      </p:childTnLst>
+                    </p:cTn>
+                  </p:par>
+                  <p:par>
+                    <p:cTn id="69" fill="hold">
+                      <p:stCondLst>
+                        <p:cond delay="indefinite"/>
+                      </p:stCondLst>
+                      <p:childTnLst>
+                        <p:par>
+                          <p:cTn id="70" fill="hold">
+                            <p:stCondLst>
+                              <p:cond delay="0"/>
+                            </p:stCondLst>
+                            <p:childTnLst>
+                              <p:par>
+                                <p:cTn id="71" presetID="10" presetClass="entr" presetSubtype="0" fill="hold" grpId="0" nodeType="clickEffect">
+                                  <p:stCondLst>
+                                    <p:cond delay="0"/>
+                                  </p:stCondLst>
+                                  <p:childTnLst>
+                                    <p:set>
+                                      <p:cBhvr>
+                                        <p:cTn id="72" dur="1" fill="hold">
+                                          <p:stCondLst>
+                                            <p:cond delay="0"/>
+                                          </p:stCondLst>
+                                        </p:cTn>
+                                        <p:tgtEl>
+                                          <p:spTgt spid="16"/>
+                                        </p:tgtEl>
+                                        <p:attrNameLst>
+                                          <p:attrName>style.visibility</p:attrName>
+                                        </p:attrNameLst>
+                                      </p:cBhvr>
+                                      <p:to>
+                                        <p:strVal val="visible"/>
+                                      </p:to>
+                                    </p:set>
+                                    <p:animEffect transition="in" filter="fade">
+                                      <p:cBhvr>
+                                        <p:cTn id="73" dur="500"/>
+                                        <p:tgtEl>
+                                          <p:spTgt spid="16"/>
+                                        </p:tgtEl>
+                                      </p:cBhvr>
+                                    </p:animEffect>
+                                  </p:childTnLst>
+                                </p:cTn>
+                              </p:par>
+                            </p:childTnLst>
+                          </p:cTn>
+                        </p:par>
+                      </p:childTnLst>
+                    </p:cTn>
+                  </p:par>
+                  <p:par>
+                    <p:cTn id="74" fill="hold">
+                      <p:stCondLst>
+                        <p:cond delay="indefinite"/>
+                      </p:stCondLst>
+                      <p:childTnLst>
+                        <p:par>
+                          <p:cTn id="75" fill="hold">
+                            <p:stCondLst>
+                              <p:cond delay="0"/>
+                            </p:stCondLst>
+                            <p:childTnLst>
+                              <p:par>
+                                <p:cTn id="76" presetID="14" presetClass="entr" presetSubtype="10" fill="hold" grpId="0" nodeType="clickEffect">
+                                  <p:stCondLst>
+                                    <p:cond delay="0"/>
+                                  </p:stCondLst>
+                                  <p:childTnLst>
+                                    <p:set>
+                                      <p:cBhvr>
+                                        <p:cTn id="77" dur="1" fill="hold">
+                                          <p:stCondLst>
+                                            <p:cond delay="0"/>
+                                          </p:stCondLst>
+                                        </p:cTn>
+                                        <p:tgtEl>
+                                          <p:spTgt spid="19"/>
+                                        </p:tgtEl>
+                                        <p:attrNameLst>
+                                          <p:attrName>style.visibility</p:attrName>
+                                        </p:attrNameLst>
+                                      </p:cBhvr>
+                                      <p:to>
+                                        <p:strVal val="visible"/>
+                                      </p:to>
+                                    </p:set>
+                                    <p:animEffect transition="in" filter="randombar(horizontal)">
+                                      <p:cBhvr>
+                                        <p:cTn id="78" dur="500"/>
+                                        <p:tgtEl>
+                                          <p:spTgt spid="19"/>
+                                        </p:tgtEl>
+                                      </p:cBhvr>
+                                    </p:animEffect>
+                                  </p:childTnLst>
+                                </p:cTn>
+                              </p:par>
+                            </p:childTnLst>
+                          </p:cTn>
+                        </p:par>
+                      </p:childTnLst>
+                    </p:cTn>
+                  </p:par>
+                  <p:par>
+                    <p:cTn id="79" fill="hold">
+                      <p:stCondLst>
+                        <p:cond delay="indefinite"/>
+                      </p:stCondLst>
+                      <p:childTnLst>
+                        <p:par>
+                          <p:cTn id="80" fill="hold">
+                            <p:stCondLst>
+                              <p:cond delay="0"/>
+                            </p:stCondLst>
+                            <p:childTnLst>
+                              <p:par>
+                                <p:cTn id="81" presetID="10" presetClass="entr" presetSubtype="0" fill="hold" grpId="0" nodeType="clickEffect">
+                                  <p:stCondLst>
+                                    <p:cond delay="0"/>
+                                  </p:stCondLst>
+                                  <p:childTnLst>
+                                    <p:set>
+                                      <p:cBhvr>
+                                        <p:cTn id="82" dur="1" fill="hold">
+                                          <p:stCondLst>
+                                            <p:cond delay="0"/>
+                                          </p:stCondLst>
+                                        </p:cTn>
+                                        <p:tgtEl>
+                                          <p:spTgt spid="20"/>
+                                        </p:tgtEl>
+                                        <p:attrNameLst>
+                                          <p:attrName>style.visibility</p:attrName>
+                                        </p:attrNameLst>
+                                      </p:cBhvr>
+                                      <p:to>
+                                        <p:strVal val="visible"/>
+                                      </p:to>
+                                    </p:set>
+                                    <p:animEffect transition="in" filter="fade">
+                                      <p:cBhvr>
+                                        <p:cTn id="83" dur="500"/>
+                                        <p:tgtEl>
+                                          <p:spTgt spid="20"/>
+                                        </p:tgtEl>
+                                      </p:cBhvr>
+                                    </p:animEffect>
                                   </p:childTnLst>
                                 </p:cTn>
                               </p:par>
@@ -4663,11 +6006,23 @@
       </p:par>
     </p:tnLst>
     <p:bldLst>
+      <p:bldP spid="3" grpId="0" animBg="1"/>
       <p:bldP spid="4" grpId="0" animBg="1"/>
+      <p:bldP spid="5" grpId="0" animBg="1"/>
       <p:bldP spid="6" grpId="0" animBg="1"/>
+      <p:bldP spid="7" grpId="0" animBg="1"/>
+      <p:bldP spid="8" grpId="0" animBg="1"/>
+      <p:bldP spid="9" grpId="0"/>
+      <p:bldP spid="10" grpId="0" animBg="1"/>
+      <p:bldP spid="11" grpId="0" animBg="1"/>
       <p:bldP spid="13" grpId="0" animBg="1"/>
+      <p:bldP spid="14" grpId="0" animBg="1"/>
       <p:bldP spid="15" grpId="0" animBg="1"/>
+      <p:bldP spid="16" grpId="0" animBg="1"/>
+      <p:bldP spid="17" grpId="0" animBg="1"/>
+      <p:bldP spid="18" grpId="0"/>
       <p:bldP spid="19" grpId="0" animBg="1"/>
+      <p:bldP spid="20" grpId="0" animBg="1"/>
     </p:bldLst>
   </p:timing>
 </p:sld>
@@ -6906,6 +8261,42 @@
           </a:p>
         </p:txBody>
       </p:sp>
+      <p:pic>
+        <p:nvPicPr>
+          <p:cNvPr id="17" name="Image 16">
+            <a:extLst>
+              <a:ext uri="{FF2B5EF4-FFF2-40B4-BE49-F238E27FC236}">
+                <a16:creationId xmlns:a16="http://schemas.microsoft.com/office/drawing/2014/main" id="{7A8420DA-143F-44A3-6192-988188F0A0C8}"/>
+              </a:ext>
+            </a:extLst>
+          </p:cNvPr>
+          <p:cNvPicPr>
+            <a:picLocks noChangeAspect="1"/>
+          </p:cNvPicPr>
+          <p:nvPr/>
+        </p:nvPicPr>
+        <p:blipFill>
+          <a:blip r:embed="rId2">
+            <a:extLst>
+              <a:ext uri="{28A0092B-C50C-407E-A947-70E740481C1C}">
+                <a14:useLocalDpi xmlns:a14="http://schemas.microsoft.com/office/drawing/2010/main" val="0"/>
+              </a:ext>
+            </a:extLst>
+          </a:blip>
+          <a:stretch>
+            <a:fillRect/>
+          </a:stretch>
+        </p:blipFill>
+        <p:spPr>
+          <a:xfrm>
+            <a:off x="261522" y="1211163"/>
+            <a:ext cx="9070866" cy="5394971"/>
+          </a:xfrm>
+          <a:prstGeom prst="rect">
+            <a:avLst/>
+          </a:prstGeom>
+        </p:spPr>
+      </p:pic>
     </p:spTree>
     <p:extLst>
       <p:ext uri="{BB962C8B-B14F-4D97-AF65-F5344CB8AC3E}">
@@ -6916,6 +8307,732 @@
   <p:clrMapOvr>
     <a:masterClrMapping/>
   </p:clrMapOvr>
+  <p:timing>
+    <p:tnLst>
+      <p:par>
+        <p:cTn id="1" dur="indefinite" restart="never" nodeType="tmRoot">
+          <p:childTnLst>
+            <p:seq concurrent="1" nextAc="seek">
+              <p:cTn id="2" dur="indefinite" nodeType="mainSeq">
+                <p:childTnLst>
+                  <p:par>
+                    <p:cTn id="3" fill="hold">
+                      <p:stCondLst>
+                        <p:cond delay="indefinite"/>
+                      </p:stCondLst>
+                      <p:childTnLst>
+                        <p:par>
+                          <p:cTn id="4" fill="hold">
+                            <p:stCondLst>
+                              <p:cond delay="0"/>
+                            </p:stCondLst>
+                            <p:childTnLst>
+                              <p:par>
+                                <p:cTn id="5" presetID="42" presetClass="entr" presetSubtype="0" fill="hold" nodeType="clickEffect">
+                                  <p:stCondLst>
+                                    <p:cond delay="0"/>
+                                  </p:stCondLst>
+                                  <p:childTnLst>
+                                    <p:set>
+                                      <p:cBhvr>
+                                        <p:cTn id="6" dur="1" fill="hold">
+                                          <p:stCondLst>
+                                            <p:cond delay="0"/>
+                                          </p:stCondLst>
+                                        </p:cTn>
+                                        <p:tgtEl>
+                                          <p:spTgt spid="3"/>
+                                        </p:tgtEl>
+                                        <p:attrNameLst>
+                                          <p:attrName>style.visibility</p:attrName>
+                                        </p:attrNameLst>
+                                      </p:cBhvr>
+                                      <p:to>
+                                        <p:strVal val="visible"/>
+                                      </p:to>
+                                    </p:set>
+                                    <p:animEffect transition="in" filter="fade">
+                                      <p:cBhvr>
+                                        <p:cTn id="7" dur="1000"/>
+                                        <p:tgtEl>
+                                          <p:spTgt spid="3"/>
+                                        </p:tgtEl>
+                                      </p:cBhvr>
+                                    </p:animEffect>
+                                    <p:anim calcmode="lin" valueType="num">
+                                      <p:cBhvr>
+                                        <p:cTn id="8" dur="1000" fill="hold"/>
+                                        <p:tgtEl>
+                                          <p:spTgt spid="3"/>
+                                        </p:tgtEl>
+                                        <p:attrNameLst>
+                                          <p:attrName>ppt_x</p:attrName>
+                                        </p:attrNameLst>
+                                      </p:cBhvr>
+                                      <p:tavLst>
+                                        <p:tav tm="0">
+                                          <p:val>
+                                            <p:strVal val="#ppt_x"/>
+                                          </p:val>
+                                        </p:tav>
+                                        <p:tav tm="100000">
+                                          <p:val>
+                                            <p:strVal val="#ppt_x"/>
+                                          </p:val>
+                                        </p:tav>
+                                      </p:tavLst>
+                                    </p:anim>
+                                    <p:anim calcmode="lin" valueType="num">
+                                      <p:cBhvr>
+                                        <p:cTn id="9" dur="1000" fill="hold"/>
+                                        <p:tgtEl>
+                                          <p:spTgt spid="3"/>
+                                        </p:tgtEl>
+                                        <p:attrNameLst>
+                                          <p:attrName>ppt_y</p:attrName>
+                                        </p:attrNameLst>
+                                      </p:cBhvr>
+                                      <p:tavLst>
+                                        <p:tav tm="0">
+                                          <p:val>
+                                            <p:strVal val="#ppt_y+.1"/>
+                                          </p:val>
+                                        </p:tav>
+                                        <p:tav tm="100000">
+                                          <p:val>
+                                            <p:strVal val="#ppt_y"/>
+                                          </p:val>
+                                        </p:tav>
+                                      </p:tavLst>
+                                    </p:anim>
+                                  </p:childTnLst>
+                                </p:cTn>
+                              </p:par>
+                              <p:par>
+                                <p:cTn id="10" presetID="42" presetClass="entr" presetSubtype="0" fill="hold" grpId="0" nodeType="withEffect">
+                                  <p:stCondLst>
+                                    <p:cond delay="0"/>
+                                  </p:stCondLst>
+                                  <p:childTnLst>
+                                    <p:set>
+                                      <p:cBhvr>
+                                        <p:cTn id="11" dur="1" fill="hold">
+                                          <p:stCondLst>
+                                            <p:cond delay="0"/>
+                                          </p:stCondLst>
+                                        </p:cTn>
+                                        <p:tgtEl>
+                                          <p:spTgt spid="5"/>
+                                        </p:tgtEl>
+                                        <p:attrNameLst>
+                                          <p:attrName>style.visibility</p:attrName>
+                                        </p:attrNameLst>
+                                      </p:cBhvr>
+                                      <p:to>
+                                        <p:strVal val="visible"/>
+                                      </p:to>
+                                    </p:set>
+                                    <p:animEffect transition="in" filter="fade">
+                                      <p:cBhvr>
+                                        <p:cTn id="12" dur="1000"/>
+                                        <p:tgtEl>
+                                          <p:spTgt spid="5"/>
+                                        </p:tgtEl>
+                                      </p:cBhvr>
+                                    </p:animEffect>
+                                    <p:anim calcmode="lin" valueType="num">
+                                      <p:cBhvr>
+                                        <p:cTn id="13" dur="1000" fill="hold"/>
+                                        <p:tgtEl>
+                                          <p:spTgt spid="5"/>
+                                        </p:tgtEl>
+                                        <p:attrNameLst>
+                                          <p:attrName>ppt_x</p:attrName>
+                                        </p:attrNameLst>
+                                      </p:cBhvr>
+                                      <p:tavLst>
+                                        <p:tav tm="0">
+                                          <p:val>
+                                            <p:strVal val="#ppt_x"/>
+                                          </p:val>
+                                        </p:tav>
+                                        <p:tav tm="100000">
+                                          <p:val>
+                                            <p:strVal val="#ppt_x"/>
+                                          </p:val>
+                                        </p:tav>
+                                      </p:tavLst>
+                                    </p:anim>
+                                    <p:anim calcmode="lin" valueType="num">
+                                      <p:cBhvr>
+                                        <p:cTn id="14" dur="1000" fill="hold"/>
+                                        <p:tgtEl>
+                                          <p:spTgt spid="5"/>
+                                        </p:tgtEl>
+                                        <p:attrNameLst>
+                                          <p:attrName>ppt_y</p:attrName>
+                                        </p:attrNameLst>
+                                      </p:cBhvr>
+                                      <p:tavLst>
+                                        <p:tav tm="0">
+                                          <p:val>
+                                            <p:strVal val="#ppt_y+.1"/>
+                                          </p:val>
+                                        </p:tav>
+                                        <p:tav tm="100000">
+                                          <p:val>
+                                            <p:strVal val="#ppt_y"/>
+                                          </p:val>
+                                        </p:tav>
+                                      </p:tavLst>
+                                    </p:anim>
+                                  </p:childTnLst>
+                                </p:cTn>
+                              </p:par>
+                            </p:childTnLst>
+                          </p:cTn>
+                        </p:par>
+                      </p:childTnLst>
+                    </p:cTn>
+                  </p:par>
+                  <p:par>
+                    <p:cTn id="15" fill="hold">
+                      <p:stCondLst>
+                        <p:cond delay="indefinite"/>
+                      </p:stCondLst>
+                      <p:childTnLst>
+                        <p:par>
+                          <p:cTn id="16" fill="hold">
+                            <p:stCondLst>
+                              <p:cond delay="0"/>
+                            </p:stCondLst>
+                            <p:childTnLst>
+                              <p:par>
+                                <p:cTn id="17" presetID="16" presetClass="entr" presetSubtype="21" fill="hold" grpId="0" nodeType="clickEffect">
+                                  <p:stCondLst>
+                                    <p:cond delay="0"/>
+                                  </p:stCondLst>
+                                  <p:childTnLst>
+                                    <p:set>
+                                      <p:cBhvr>
+                                        <p:cTn id="18" dur="1" fill="hold">
+                                          <p:stCondLst>
+                                            <p:cond delay="0"/>
+                                          </p:stCondLst>
+                                        </p:cTn>
+                                        <p:tgtEl>
+                                          <p:spTgt spid="10"/>
+                                        </p:tgtEl>
+                                        <p:attrNameLst>
+                                          <p:attrName>style.visibility</p:attrName>
+                                        </p:attrNameLst>
+                                      </p:cBhvr>
+                                      <p:to>
+                                        <p:strVal val="visible"/>
+                                      </p:to>
+                                    </p:set>
+                                    <p:animEffect transition="in" filter="barn(inVertical)">
+                                      <p:cBhvr>
+                                        <p:cTn id="19" dur="500"/>
+                                        <p:tgtEl>
+                                          <p:spTgt spid="10"/>
+                                        </p:tgtEl>
+                                      </p:cBhvr>
+                                    </p:animEffect>
+                                  </p:childTnLst>
+                                </p:cTn>
+                              </p:par>
+                              <p:par>
+                                <p:cTn id="20" presetID="16" presetClass="entr" presetSubtype="21" fill="hold" grpId="0" nodeType="withEffect">
+                                  <p:stCondLst>
+                                    <p:cond delay="0"/>
+                                  </p:stCondLst>
+                                  <p:childTnLst>
+                                    <p:set>
+                                      <p:cBhvr>
+                                        <p:cTn id="21" dur="1" fill="hold">
+                                          <p:stCondLst>
+                                            <p:cond delay="0"/>
+                                          </p:stCondLst>
+                                        </p:cTn>
+                                        <p:tgtEl>
+                                          <p:spTgt spid="11"/>
+                                        </p:tgtEl>
+                                        <p:attrNameLst>
+                                          <p:attrName>style.visibility</p:attrName>
+                                        </p:attrNameLst>
+                                      </p:cBhvr>
+                                      <p:to>
+                                        <p:strVal val="visible"/>
+                                      </p:to>
+                                    </p:set>
+                                    <p:animEffect transition="in" filter="barn(inVertical)">
+                                      <p:cBhvr>
+                                        <p:cTn id="22" dur="500"/>
+                                        <p:tgtEl>
+                                          <p:spTgt spid="11"/>
+                                        </p:tgtEl>
+                                      </p:cBhvr>
+                                    </p:animEffect>
+                                  </p:childTnLst>
+                                </p:cTn>
+                              </p:par>
+                            </p:childTnLst>
+                          </p:cTn>
+                        </p:par>
+                      </p:childTnLst>
+                    </p:cTn>
+                  </p:par>
+                  <p:par>
+                    <p:cTn id="23" fill="hold">
+                      <p:stCondLst>
+                        <p:cond delay="indefinite"/>
+                      </p:stCondLst>
+                      <p:childTnLst>
+                        <p:par>
+                          <p:cTn id="24" fill="hold">
+                            <p:stCondLst>
+                              <p:cond delay="0"/>
+                            </p:stCondLst>
+                            <p:childTnLst>
+                              <p:par>
+                                <p:cTn id="25" presetID="16" presetClass="entr" presetSubtype="21" fill="hold" grpId="0" nodeType="clickEffect">
+                                  <p:stCondLst>
+                                    <p:cond delay="0"/>
+                                  </p:stCondLst>
+                                  <p:childTnLst>
+                                    <p:set>
+                                      <p:cBhvr>
+                                        <p:cTn id="26" dur="1" fill="hold">
+                                          <p:stCondLst>
+                                            <p:cond delay="0"/>
+                                          </p:stCondLst>
+                                        </p:cTn>
+                                        <p:tgtEl>
+                                          <p:spTgt spid="6"/>
+                                        </p:tgtEl>
+                                        <p:attrNameLst>
+                                          <p:attrName>style.visibility</p:attrName>
+                                        </p:attrNameLst>
+                                      </p:cBhvr>
+                                      <p:to>
+                                        <p:strVal val="visible"/>
+                                      </p:to>
+                                    </p:set>
+                                    <p:animEffect transition="in" filter="barn(inVertical)">
+                                      <p:cBhvr>
+                                        <p:cTn id="27" dur="500"/>
+                                        <p:tgtEl>
+                                          <p:spTgt spid="6"/>
+                                        </p:tgtEl>
+                                      </p:cBhvr>
+                                    </p:animEffect>
+                                  </p:childTnLst>
+                                </p:cTn>
+                              </p:par>
+                              <p:par>
+                                <p:cTn id="28" presetID="16" presetClass="entr" presetSubtype="21" fill="hold" grpId="0" nodeType="withEffect">
+                                  <p:stCondLst>
+                                    <p:cond delay="0"/>
+                                  </p:stCondLst>
+                                  <p:childTnLst>
+                                    <p:set>
+                                      <p:cBhvr>
+                                        <p:cTn id="29" dur="1" fill="hold">
+                                          <p:stCondLst>
+                                            <p:cond delay="0"/>
+                                          </p:stCondLst>
+                                        </p:cTn>
+                                        <p:tgtEl>
+                                          <p:spTgt spid="7"/>
+                                        </p:tgtEl>
+                                        <p:attrNameLst>
+                                          <p:attrName>style.visibility</p:attrName>
+                                        </p:attrNameLst>
+                                      </p:cBhvr>
+                                      <p:to>
+                                        <p:strVal val="visible"/>
+                                      </p:to>
+                                    </p:set>
+                                    <p:animEffect transition="in" filter="barn(inVertical)">
+                                      <p:cBhvr>
+                                        <p:cTn id="30" dur="500"/>
+                                        <p:tgtEl>
+                                          <p:spTgt spid="7"/>
+                                        </p:tgtEl>
+                                      </p:cBhvr>
+                                    </p:animEffect>
+                                  </p:childTnLst>
+                                </p:cTn>
+                              </p:par>
+                              <p:par>
+                                <p:cTn id="31" presetID="16" presetClass="entr" presetSubtype="21" fill="hold" grpId="0" nodeType="withEffect">
+                                  <p:stCondLst>
+                                    <p:cond delay="0"/>
+                                  </p:stCondLst>
+                                  <p:childTnLst>
+                                    <p:set>
+                                      <p:cBhvr>
+                                        <p:cTn id="32" dur="1" fill="hold">
+                                          <p:stCondLst>
+                                            <p:cond delay="0"/>
+                                          </p:stCondLst>
+                                        </p:cTn>
+                                        <p:tgtEl>
+                                          <p:spTgt spid="8"/>
+                                        </p:tgtEl>
+                                        <p:attrNameLst>
+                                          <p:attrName>style.visibility</p:attrName>
+                                        </p:attrNameLst>
+                                      </p:cBhvr>
+                                      <p:to>
+                                        <p:strVal val="visible"/>
+                                      </p:to>
+                                    </p:set>
+                                    <p:animEffect transition="in" filter="barn(inVertical)">
+                                      <p:cBhvr>
+                                        <p:cTn id="33" dur="500"/>
+                                        <p:tgtEl>
+                                          <p:spTgt spid="8"/>
+                                        </p:tgtEl>
+                                      </p:cBhvr>
+                                    </p:animEffect>
+                                  </p:childTnLst>
+                                </p:cTn>
+                              </p:par>
+                            </p:childTnLst>
+                          </p:cTn>
+                        </p:par>
+                      </p:childTnLst>
+                    </p:cTn>
+                  </p:par>
+                  <p:par>
+                    <p:cTn id="34" fill="hold">
+                      <p:stCondLst>
+                        <p:cond delay="indefinite"/>
+                      </p:stCondLst>
+                      <p:childTnLst>
+                        <p:par>
+                          <p:cTn id="35" fill="hold">
+                            <p:stCondLst>
+                              <p:cond delay="0"/>
+                            </p:stCondLst>
+                            <p:childTnLst>
+                              <p:par>
+                                <p:cTn id="36" presetID="16" presetClass="entr" presetSubtype="21" fill="hold" grpId="0" nodeType="clickEffect">
+                                  <p:stCondLst>
+                                    <p:cond delay="0"/>
+                                  </p:stCondLst>
+                                  <p:childTnLst>
+                                    <p:set>
+                                      <p:cBhvr>
+                                        <p:cTn id="37" dur="1" fill="hold">
+                                          <p:stCondLst>
+                                            <p:cond delay="0"/>
+                                          </p:stCondLst>
+                                        </p:cTn>
+                                        <p:tgtEl>
+                                          <p:spTgt spid="9"/>
+                                        </p:tgtEl>
+                                        <p:attrNameLst>
+                                          <p:attrName>style.visibility</p:attrName>
+                                        </p:attrNameLst>
+                                      </p:cBhvr>
+                                      <p:to>
+                                        <p:strVal val="visible"/>
+                                      </p:to>
+                                    </p:set>
+                                    <p:animEffect transition="in" filter="barn(inVertical)">
+                                      <p:cBhvr>
+                                        <p:cTn id="38" dur="500"/>
+                                        <p:tgtEl>
+                                          <p:spTgt spid="9"/>
+                                        </p:tgtEl>
+                                      </p:cBhvr>
+                                    </p:animEffect>
+                                  </p:childTnLst>
+                                </p:cTn>
+                              </p:par>
+                              <p:par>
+                                <p:cTn id="39" presetID="16" presetClass="entr" presetSubtype="21" fill="hold" grpId="0" nodeType="withEffect">
+                                  <p:stCondLst>
+                                    <p:cond delay="0"/>
+                                  </p:stCondLst>
+                                  <p:childTnLst>
+                                    <p:set>
+                                      <p:cBhvr>
+                                        <p:cTn id="40" dur="1" fill="hold">
+                                          <p:stCondLst>
+                                            <p:cond delay="0"/>
+                                          </p:stCondLst>
+                                        </p:cTn>
+                                        <p:tgtEl>
+                                          <p:spTgt spid="12"/>
+                                        </p:tgtEl>
+                                        <p:attrNameLst>
+                                          <p:attrName>style.visibility</p:attrName>
+                                        </p:attrNameLst>
+                                      </p:cBhvr>
+                                      <p:to>
+                                        <p:strVal val="visible"/>
+                                      </p:to>
+                                    </p:set>
+                                    <p:animEffect transition="in" filter="barn(inVertical)">
+                                      <p:cBhvr>
+                                        <p:cTn id="41" dur="500"/>
+                                        <p:tgtEl>
+                                          <p:spTgt spid="12"/>
+                                        </p:tgtEl>
+                                      </p:cBhvr>
+                                    </p:animEffect>
+                                  </p:childTnLst>
+                                </p:cTn>
+                              </p:par>
+                              <p:par>
+                                <p:cTn id="42" presetID="16" presetClass="entr" presetSubtype="21" fill="hold" grpId="0" nodeType="withEffect">
+                                  <p:stCondLst>
+                                    <p:cond delay="0"/>
+                                  </p:stCondLst>
+                                  <p:childTnLst>
+                                    <p:set>
+                                      <p:cBhvr>
+                                        <p:cTn id="43" dur="1" fill="hold">
+                                          <p:stCondLst>
+                                            <p:cond delay="0"/>
+                                          </p:stCondLst>
+                                        </p:cTn>
+                                        <p:tgtEl>
+                                          <p:spTgt spid="13"/>
+                                        </p:tgtEl>
+                                        <p:attrNameLst>
+                                          <p:attrName>style.visibility</p:attrName>
+                                        </p:attrNameLst>
+                                      </p:cBhvr>
+                                      <p:to>
+                                        <p:strVal val="visible"/>
+                                      </p:to>
+                                    </p:set>
+                                    <p:animEffect transition="in" filter="barn(inVertical)">
+                                      <p:cBhvr>
+                                        <p:cTn id="44" dur="500"/>
+                                        <p:tgtEl>
+                                          <p:spTgt spid="13"/>
+                                        </p:tgtEl>
+                                      </p:cBhvr>
+                                    </p:animEffect>
+                                  </p:childTnLst>
+                                </p:cTn>
+                              </p:par>
+                            </p:childTnLst>
+                          </p:cTn>
+                        </p:par>
+                      </p:childTnLst>
+                    </p:cTn>
+                  </p:par>
+                  <p:par>
+                    <p:cTn id="45" fill="hold">
+                      <p:stCondLst>
+                        <p:cond delay="indefinite"/>
+                      </p:stCondLst>
+                      <p:childTnLst>
+                        <p:par>
+                          <p:cTn id="46" fill="hold">
+                            <p:stCondLst>
+                              <p:cond delay="0"/>
+                            </p:stCondLst>
+                            <p:childTnLst>
+                              <p:par>
+                                <p:cTn id="47" presetID="16" presetClass="entr" presetSubtype="21" fill="hold" grpId="0" nodeType="clickEffect">
+                                  <p:stCondLst>
+                                    <p:cond delay="0"/>
+                                  </p:stCondLst>
+                                  <p:childTnLst>
+                                    <p:set>
+                                      <p:cBhvr>
+                                        <p:cTn id="48" dur="1" fill="hold">
+                                          <p:stCondLst>
+                                            <p:cond delay="0"/>
+                                          </p:stCondLst>
+                                        </p:cTn>
+                                        <p:tgtEl>
+                                          <p:spTgt spid="14"/>
+                                        </p:tgtEl>
+                                        <p:attrNameLst>
+                                          <p:attrName>style.visibility</p:attrName>
+                                        </p:attrNameLst>
+                                      </p:cBhvr>
+                                      <p:to>
+                                        <p:strVal val="visible"/>
+                                      </p:to>
+                                    </p:set>
+                                    <p:animEffect transition="in" filter="barn(inVertical)">
+                                      <p:cBhvr>
+                                        <p:cTn id="49" dur="500"/>
+                                        <p:tgtEl>
+                                          <p:spTgt spid="14"/>
+                                        </p:tgtEl>
+                                      </p:cBhvr>
+                                    </p:animEffect>
+                                  </p:childTnLst>
+                                </p:cTn>
+                              </p:par>
+                              <p:par>
+                                <p:cTn id="50" presetID="16" presetClass="entr" presetSubtype="21" fill="hold" grpId="0" nodeType="withEffect">
+                                  <p:stCondLst>
+                                    <p:cond delay="0"/>
+                                  </p:stCondLst>
+                                  <p:childTnLst>
+                                    <p:set>
+                                      <p:cBhvr>
+                                        <p:cTn id="51" dur="1" fill="hold">
+                                          <p:stCondLst>
+                                            <p:cond delay="0"/>
+                                          </p:stCondLst>
+                                        </p:cTn>
+                                        <p:tgtEl>
+                                          <p:spTgt spid="15"/>
+                                        </p:tgtEl>
+                                        <p:attrNameLst>
+                                          <p:attrName>style.visibility</p:attrName>
+                                        </p:attrNameLst>
+                                      </p:cBhvr>
+                                      <p:to>
+                                        <p:strVal val="visible"/>
+                                      </p:to>
+                                    </p:set>
+                                    <p:animEffect transition="in" filter="barn(inVertical)">
+                                      <p:cBhvr>
+                                        <p:cTn id="52" dur="500"/>
+                                        <p:tgtEl>
+                                          <p:spTgt spid="15"/>
+                                        </p:tgtEl>
+                                      </p:cBhvr>
+                                    </p:animEffect>
+                                  </p:childTnLst>
+                                </p:cTn>
+                              </p:par>
+                              <p:par>
+                                <p:cTn id="53" presetID="16" presetClass="entr" presetSubtype="21" fill="hold" grpId="0" nodeType="withEffect">
+                                  <p:stCondLst>
+                                    <p:cond delay="0"/>
+                                  </p:stCondLst>
+                                  <p:childTnLst>
+                                    <p:set>
+                                      <p:cBhvr>
+                                        <p:cTn id="54" dur="1" fill="hold">
+                                          <p:stCondLst>
+                                            <p:cond delay="0"/>
+                                          </p:stCondLst>
+                                        </p:cTn>
+                                        <p:tgtEl>
+                                          <p:spTgt spid="16"/>
+                                        </p:tgtEl>
+                                        <p:attrNameLst>
+                                          <p:attrName>style.visibility</p:attrName>
+                                        </p:attrNameLst>
+                                      </p:cBhvr>
+                                      <p:to>
+                                        <p:strVal val="visible"/>
+                                      </p:to>
+                                    </p:set>
+                                    <p:animEffect transition="in" filter="barn(inVertical)">
+                                      <p:cBhvr>
+                                        <p:cTn id="55" dur="500"/>
+                                        <p:tgtEl>
+                                          <p:spTgt spid="16"/>
+                                        </p:tgtEl>
+                                      </p:cBhvr>
+                                    </p:animEffect>
+                                  </p:childTnLst>
+                                </p:cTn>
+                              </p:par>
+                            </p:childTnLst>
+                          </p:cTn>
+                        </p:par>
+                      </p:childTnLst>
+                    </p:cTn>
+                  </p:par>
+                  <p:par>
+                    <p:cTn id="56" fill="hold">
+                      <p:stCondLst>
+                        <p:cond delay="indefinite"/>
+                      </p:stCondLst>
+                      <p:childTnLst>
+                        <p:par>
+                          <p:cTn id="57" fill="hold">
+                            <p:stCondLst>
+                              <p:cond delay="0"/>
+                            </p:stCondLst>
+                            <p:childTnLst>
+                              <p:par>
+                                <p:cTn id="58" presetID="1" presetClass="entr" presetSubtype="0" fill="hold" nodeType="clickEffect">
+                                  <p:stCondLst>
+                                    <p:cond delay="0"/>
+                                  </p:stCondLst>
+                                  <p:childTnLst>
+                                    <p:set>
+                                      <p:cBhvr>
+                                        <p:cTn id="59" dur="1" fill="hold">
+                                          <p:stCondLst>
+                                            <p:cond delay="0"/>
+                                          </p:stCondLst>
+                                        </p:cTn>
+                                        <p:tgtEl>
+                                          <p:spTgt spid="17"/>
+                                        </p:tgtEl>
+                                        <p:attrNameLst>
+                                          <p:attrName>style.visibility</p:attrName>
+                                        </p:attrNameLst>
+                                      </p:cBhvr>
+                                      <p:to>
+                                        <p:strVal val="visible"/>
+                                      </p:to>
+                                    </p:set>
+                                  </p:childTnLst>
+                                </p:cTn>
+                              </p:par>
+                            </p:childTnLst>
+                          </p:cTn>
+                        </p:par>
+                      </p:childTnLst>
+                    </p:cTn>
+                  </p:par>
+                </p:childTnLst>
+              </p:cTn>
+              <p:prevCondLst>
+                <p:cond evt="onPrev" delay="0">
+                  <p:tgtEl>
+                    <p:sldTgt/>
+                  </p:tgtEl>
+                </p:cond>
+              </p:prevCondLst>
+              <p:nextCondLst>
+                <p:cond evt="onNext" delay="0">
+                  <p:tgtEl>
+                    <p:sldTgt/>
+                  </p:tgtEl>
+                </p:cond>
+              </p:nextCondLst>
+            </p:seq>
+          </p:childTnLst>
+        </p:cTn>
+      </p:par>
+    </p:tnLst>
+    <p:bldLst>
+      <p:bldP spid="5" grpId="0"/>
+      <p:bldP spid="6" grpId="0" animBg="1"/>
+      <p:bldP spid="7" grpId="0" animBg="1"/>
+      <p:bldP spid="8" grpId="0"/>
+      <p:bldP spid="9" grpId="0" animBg="1"/>
+      <p:bldP spid="10" grpId="0" animBg="1"/>
+      <p:bldP spid="11" grpId="0"/>
+      <p:bldP spid="12" grpId="0" animBg="1"/>
+      <p:bldP spid="13" grpId="0"/>
+      <p:bldP spid="14" grpId="0" animBg="1"/>
+      <p:bldP spid="15" grpId="0" animBg="1"/>
+      <p:bldP spid="16" grpId="0"/>
+    </p:bldLst>
+  </p:timing>
 </p:sld>
 </file>
 
@@ -8461,6 +10578,42 @@
           </a:p>
         </p:txBody>
       </p:sp>
+      <p:pic>
+        <p:nvPicPr>
+          <p:cNvPr id="18" name="Image 17">
+            <a:extLst>
+              <a:ext uri="{FF2B5EF4-FFF2-40B4-BE49-F238E27FC236}">
+                <a16:creationId xmlns:a16="http://schemas.microsoft.com/office/drawing/2014/main" id="{133C7256-04B2-F8FD-1C89-813B3DE132B5}"/>
+              </a:ext>
+            </a:extLst>
+          </p:cNvPr>
+          <p:cNvPicPr>
+            <a:picLocks noChangeAspect="1"/>
+          </p:cNvPicPr>
+          <p:nvPr/>
+        </p:nvPicPr>
+        <p:blipFill>
+          <a:blip r:embed="rId2">
+            <a:extLst>
+              <a:ext uri="{28A0092B-C50C-407E-A947-70E740481C1C}">
+                <a14:useLocalDpi xmlns:a14="http://schemas.microsoft.com/office/drawing/2010/main" val="0"/>
+              </a:ext>
+            </a:extLst>
+          </a:blip>
+          <a:stretch>
+            <a:fillRect/>
+          </a:stretch>
+        </p:blipFill>
+        <p:spPr>
+          <a:xfrm>
+            <a:off x="288954" y="1229636"/>
+            <a:ext cx="9043434" cy="5394971"/>
+          </a:xfrm>
+          <a:prstGeom prst="rect">
+            <a:avLst/>
+          </a:prstGeom>
+        </p:spPr>
+      </p:pic>
     </p:spTree>
     <p:extLst>
       <p:ext uri="{BB962C8B-B14F-4D97-AF65-F5344CB8AC3E}">
@@ -8471,6 +10624,660 @@
   <p:clrMapOvr>
     <a:masterClrMapping/>
   </p:clrMapOvr>
+  <p:timing>
+    <p:tnLst>
+      <p:par>
+        <p:cTn id="1" dur="indefinite" restart="never" nodeType="tmRoot">
+          <p:childTnLst>
+            <p:seq concurrent="1" nextAc="seek">
+              <p:cTn id="2" dur="indefinite" nodeType="mainSeq">
+                <p:childTnLst>
+                  <p:par>
+                    <p:cTn id="3" fill="hold">
+                      <p:stCondLst>
+                        <p:cond delay="indefinite"/>
+                      </p:stCondLst>
+                      <p:childTnLst>
+                        <p:par>
+                          <p:cTn id="4" fill="hold">
+                            <p:stCondLst>
+                              <p:cond delay="0"/>
+                            </p:stCondLst>
+                            <p:childTnLst>
+                              <p:par>
+                                <p:cTn id="5" presetID="2" presetClass="entr" presetSubtype="4" fill="hold" grpId="0" nodeType="clickEffect">
+                                  <p:stCondLst>
+                                    <p:cond delay="0"/>
+                                  </p:stCondLst>
+                                  <p:childTnLst>
+                                    <p:set>
+                                      <p:cBhvr>
+                                        <p:cTn id="6" dur="1" fill="hold">
+                                          <p:stCondLst>
+                                            <p:cond delay="0"/>
+                                          </p:stCondLst>
+                                        </p:cTn>
+                                        <p:tgtEl>
+                                          <p:spTgt spid="4"/>
+                                        </p:tgtEl>
+                                        <p:attrNameLst>
+                                          <p:attrName>style.visibility</p:attrName>
+                                        </p:attrNameLst>
+                                      </p:cBhvr>
+                                      <p:to>
+                                        <p:strVal val="visible"/>
+                                      </p:to>
+                                    </p:set>
+                                    <p:anim calcmode="lin" valueType="num">
+                                      <p:cBhvr additive="base">
+                                        <p:cTn id="7" dur="500" fill="hold"/>
+                                        <p:tgtEl>
+                                          <p:spTgt spid="4"/>
+                                        </p:tgtEl>
+                                        <p:attrNameLst>
+                                          <p:attrName>ppt_x</p:attrName>
+                                        </p:attrNameLst>
+                                      </p:cBhvr>
+                                      <p:tavLst>
+                                        <p:tav tm="0">
+                                          <p:val>
+                                            <p:strVal val="#ppt_x"/>
+                                          </p:val>
+                                        </p:tav>
+                                        <p:tav tm="100000">
+                                          <p:val>
+                                            <p:strVal val="#ppt_x"/>
+                                          </p:val>
+                                        </p:tav>
+                                      </p:tavLst>
+                                    </p:anim>
+                                    <p:anim calcmode="lin" valueType="num">
+                                      <p:cBhvr additive="base">
+                                        <p:cTn id="8" dur="500" fill="hold"/>
+                                        <p:tgtEl>
+                                          <p:spTgt spid="4"/>
+                                        </p:tgtEl>
+                                        <p:attrNameLst>
+                                          <p:attrName>ppt_y</p:attrName>
+                                        </p:attrNameLst>
+                                      </p:cBhvr>
+                                      <p:tavLst>
+                                        <p:tav tm="0">
+                                          <p:val>
+                                            <p:strVal val="1+#ppt_h/2"/>
+                                          </p:val>
+                                        </p:tav>
+                                        <p:tav tm="100000">
+                                          <p:val>
+                                            <p:strVal val="#ppt_y"/>
+                                          </p:val>
+                                        </p:tav>
+                                      </p:tavLst>
+                                    </p:anim>
+                                  </p:childTnLst>
+                                </p:cTn>
+                              </p:par>
+                            </p:childTnLst>
+                          </p:cTn>
+                        </p:par>
+                      </p:childTnLst>
+                    </p:cTn>
+                  </p:par>
+                  <p:par>
+                    <p:cTn id="9" fill="hold">
+                      <p:stCondLst>
+                        <p:cond delay="indefinite"/>
+                      </p:stCondLst>
+                      <p:childTnLst>
+                        <p:par>
+                          <p:cTn id="10" fill="hold">
+                            <p:stCondLst>
+                              <p:cond delay="0"/>
+                            </p:stCondLst>
+                            <p:childTnLst>
+                              <p:par>
+                                <p:cTn id="11" presetID="10" presetClass="entr" presetSubtype="0" fill="hold" nodeType="clickEffect">
+                                  <p:stCondLst>
+                                    <p:cond delay="0"/>
+                                  </p:stCondLst>
+                                  <p:childTnLst>
+                                    <p:set>
+                                      <p:cBhvr>
+                                        <p:cTn id="12" dur="1" fill="hold">
+                                          <p:stCondLst>
+                                            <p:cond delay="0"/>
+                                          </p:stCondLst>
+                                        </p:cTn>
+                                        <p:tgtEl>
+                                          <p:spTgt spid="3"/>
+                                        </p:tgtEl>
+                                        <p:attrNameLst>
+                                          <p:attrName>style.visibility</p:attrName>
+                                        </p:attrNameLst>
+                                      </p:cBhvr>
+                                      <p:to>
+                                        <p:strVal val="visible"/>
+                                      </p:to>
+                                    </p:set>
+                                    <p:animEffect transition="in" filter="fade">
+                                      <p:cBhvr>
+                                        <p:cTn id="13" dur="500"/>
+                                        <p:tgtEl>
+                                          <p:spTgt spid="3"/>
+                                        </p:tgtEl>
+                                      </p:cBhvr>
+                                    </p:animEffect>
+                                  </p:childTnLst>
+                                </p:cTn>
+                              </p:par>
+                              <p:par>
+                                <p:cTn id="14" presetID="10" presetClass="entr" presetSubtype="0" fill="hold" grpId="0" nodeType="withEffect">
+                                  <p:stCondLst>
+                                    <p:cond delay="0"/>
+                                  </p:stCondLst>
+                                  <p:childTnLst>
+                                    <p:set>
+                                      <p:cBhvr>
+                                        <p:cTn id="15" dur="1" fill="hold">
+                                          <p:stCondLst>
+                                            <p:cond delay="0"/>
+                                          </p:stCondLst>
+                                        </p:cTn>
+                                        <p:tgtEl>
+                                          <p:spTgt spid="5"/>
+                                        </p:tgtEl>
+                                        <p:attrNameLst>
+                                          <p:attrName>style.visibility</p:attrName>
+                                        </p:attrNameLst>
+                                      </p:cBhvr>
+                                      <p:to>
+                                        <p:strVal val="visible"/>
+                                      </p:to>
+                                    </p:set>
+                                    <p:animEffect transition="in" filter="fade">
+                                      <p:cBhvr>
+                                        <p:cTn id="16" dur="500"/>
+                                        <p:tgtEl>
+                                          <p:spTgt spid="5"/>
+                                        </p:tgtEl>
+                                      </p:cBhvr>
+                                    </p:animEffect>
+                                  </p:childTnLst>
+                                </p:cTn>
+                              </p:par>
+                              <p:par>
+                                <p:cTn id="17" presetID="10" presetClass="entr" presetSubtype="0" fill="hold" grpId="0" nodeType="withEffect">
+                                  <p:stCondLst>
+                                    <p:cond delay="0"/>
+                                  </p:stCondLst>
+                                  <p:childTnLst>
+                                    <p:set>
+                                      <p:cBhvr>
+                                        <p:cTn id="18" dur="1" fill="hold">
+                                          <p:stCondLst>
+                                            <p:cond delay="0"/>
+                                          </p:stCondLst>
+                                        </p:cTn>
+                                        <p:tgtEl>
+                                          <p:spTgt spid="6"/>
+                                        </p:tgtEl>
+                                        <p:attrNameLst>
+                                          <p:attrName>style.visibility</p:attrName>
+                                        </p:attrNameLst>
+                                      </p:cBhvr>
+                                      <p:to>
+                                        <p:strVal val="visible"/>
+                                      </p:to>
+                                    </p:set>
+                                    <p:animEffect transition="in" filter="fade">
+                                      <p:cBhvr>
+                                        <p:cTn id="19" dur="500"/>
+                                        <p:tgtEl>
+                                          <p:spTgt spid="6"/>
+                                        </p:tgtEl>
+                                      </p:cBhvr>
+                                    </p:animEffect>
+                                  </p:childTnLst>
+                                </p:cTn>
+                              </p:par>
+                              <p:par>
+                                <p:cTn id="20" presetID="10" presetClass="entr" presetSubtype="0" fill="hold" grpId="0" nodeType="withEffect">
+                                  <p:stCondLst>
+                                    <p:cond delay="0"/>
+                                  </p:stCondLst>
+                                  <p:childTnLst>
+                                    <p:set>
+                                      <p:cBhvr>
+                                        <p:cTn id="21" dur="1" fill="hold">
+                                          <p:stCondLst>
+                                            <p:cond delay="0"/>
+                                          </p:stCondLst>
+                                        </p:cTn>
+                                        <p:tgtEl>
+                                          <p:spTgt spid="7"/>
+                                        </p:tgtEl>
+                                        <p:attrNameLst>
+                                          <p:attrName>style.visibility</p:attrName>
+                                        </p:attrNameLst>
+                                      </p:cBhvr>
+                                      <p:to>
+                                        <p:strVal val="visible"/>
+                                      </p:to>
+                                    </p:set>
+                                    <p:animEffect transition="in" filter="fade">
+                                      <p:cBhvr>
+                                        <p:cTn id="22" dur="500"/>
+                                        <p:tgtEl>
+                                          <p:spTgt spid="7"/>
+                                        </p:tgtEl>
+                                      </p:cBhvr>
+                                    </p:animEffect>
+                                  </p:childTnLst>
+                                </p:cTn>
+                              </p:par>
+                              <p:par>
+                                <p:cTn id="23" presetID="10" presetClass="entr" presetSubtype="0" fill="hold" grpId="0" nodeType="withEffect">
+                                  <p:stCondLst>
+                                    <p:cond delay="0"/>
+                                  </p:stCondLst>
+                                  <p:childTnLst>
+                                    <p:set>
+                                      <p:cBhvr>
+                                        <p:cTn id="24" dur="1" fill="hold">
+                                          <p:stCondLst>
+                                            <p:cond delay="0"/>
+                                          </p:stCondLst>
+                                        </p:cTn>
+                                        <p:tgtEl>
+                                          <p:spTgt spid="8"/>
+                                        </p:tgtEl>
+                                        <p:attrNameLst>
+                                          <p:attrName>style.visibility</p:attrName>
+                                        </p:attrNameLst>
+                                      </p:cBhvr>
+                                      <p:to>
+                                        <p:strVal val="visible"/>
+                                      </p:to>
+                                    </p:set>
+                                    <p:animEffect transition="in" filter="fade">
+                                      <p:cBhvr>
+                                        <p:cTn id="25" dur="500"/>
+                                        <p:tgtEl>
+                                          <p:spTgt spid="8"/>
+                                        </p:tgtEl>
+                                      </p:cBhvr>
+                                    </p:animEffect>
+                                  </p:childTnLst>
+                                </p:cTn>
+                              </p:par>
+                              <p:par>
+                                <p:cTn id="26" presetID="10" presetClass="entr" presetSubtype="0" fill="hold" grpId="0" nodeType="withEffect">
+                                  <p:stCondLst>
+                                    <p:cond delay="0"/>
+                                  </p:stCondLst>
+                                  <p:childTnLst>
+                                    <p:set>
+                                      <p:cBhvr>
+                                        <p:cTn id="27" dur="1" fill="hold">
+                                          <p:stCondLst>
+                                            <p:cond delay="0"/>
+                                          </p:stCondLst>
+                                        </p:cTn>
+                                        <p:tgtEl>
+                                          <p:spTgt spid="9"/>
+                                        </p:tgtEl>
+                                        <p:attrNameLst>
+                                          <p:attrName>style.visibility</p:attrName>
+                                        </p:attrNameLst>
+                                      </p:cBhvr>
+                                      <p:to>
+                                        <p:strVal val="visible"/>
+                                      </p:to>
+                                    </p:set>
+                                    <p:animEffect transition="in" filter="fade">
+                                      <p:cBhvr>
+                                        <p:cTn id="28" dur="500"/>
+                                        <p:tgtEl>
+                                          <p:spTgt spid="9"/>
+                                        </p:tgtEl>
+                                      </p:cBhvr>
+                                    </p:animEffect>
+                                  </p:childTnLst>
+                                </p:cTn>
+                              </p:par>
+                              <p:par>
+                                <p:cTn id="29" presetID="10" presetClass="entr" presetSubtype="0" fill="hold" grpId="0" nodeType="withEffect">
+                                  <p:stCondLst>
+                                    <p:cond delay="0"/>
+                                  </p:stCondLst>
+                                  <p:childTnLst>
+                                    <p:set>
+                                      <p:cBhvr>
+                                        <p:cTn id="30" dur="1" fill="hold">
+                                          <p:stCondLst>
+                                            <p:cond delay="0"/>
+                                          </p:stCondLst>
+                                        </p:cTn>
+                                        <p:tgtEl>
+                                          <p:spTgt spid="10"/>
+                                        </p:tgtEl>
+                                        <p:attrNameLst>
+                                          <p:attrName>style.visibility</p:attrName>
+                                        </p:attrNameLst>
+                                      </p:cBhvr>
+                                      <p:to>
+                                        <p:strVal val="visible"/>
+                                      </p:to>
+                                    </p:set>
+                                    <p:animEffect transition="in" filter="fade">
+                                      <p:cBhvr>
+                                        <p:cTn id="31" dur="500"/>
+                                        <p:tgtEl>
+                                          <p:spTgt spid="10"/>
+                                        </p:tgtEl>
+                                      </p:cBhvr>
+                                    </p:animEffect>
+                                  </p:childTnLst>
+                                </p:cTn>
+                              </p:par>
+                              <p:par>
+                                <p:cTn id="32" presetID="10" presetClass="entr" presetSubtype="0" fill="hold" grpId="0" nodeType="withEffect">
+                                  <p:stCondLst>
+                                    <p:cond delay="0"/>
+                                  </p:stCondLst>
+                                  <p:childTnLst>
+                                    <p:set>
+                                      <p:cBhvr>
+                                        <p:cTn id="33" dur="1" fill="hold">
+                                          <p:stCondLst>
+                                            <p:cond delay="0"/>
+                                          </p:stCondLst>
+                                        </p:cTn>
+                                        <p:tgtEl>
+                                          <p:spTgt spid="11"/>
+                                        </p:tgtEl>
+                                        <p:attrNameLst>
+                                          <p:attrName>style.visibility</p:attrName>
+                                        </p:attrNameLst>
+                                      </p:cBhvr>
+                                      <p:to>
+                                        <p:strVal val="visible"/>
+                                      </p:to>
+                                    </p:set>
+                                    <p:animEffect transition="in" filter="fade">
+                                      <p:cBhvr>
+                                        <p:cTn id="34" dur="500"/>
+                                        <p:tgtEl>
+                                          <p:spTgt spid="11"/>
+                                        </p:tgtEl>
+                                      </p:cBhvr>
+                                    </p:animEffect>
+                                  </p:childTnLst>
+                                </p:cTn>
+                              </p:par>
+                              <p:par>
+                                <p:cTn id="35" presetID="10" presetClass="entr" presetSubtype="0" fill="hold" grpId="0" nodeType="withEffect">
+                                  <p:stCondLst>
+                                    <p:cond delay="0"/>
+                                  </p:stCondLst>
+                                  <p:childTnLst>
+                                    <p:set>
+                                      <p:cBhvr>
+                                        <p:cTn id="36" dur="1" fill="hold">
+                                          <p:stCondLst>
+                                            <p:cond delay="0"/>
+                                          </p:stCondLst>
+                                        </p:cTn>
+                                        <p:tgtEl>
+                                          <p:spTgt spid="12"/>
+                                        </p:tgtEl>
+                                        <p:attrNameLst>
+                                          <p:attrName>style.visibility</p:attrName>
+                                        </p:attrNameLst>
+                                      </p:cBhvr>
+                                      <p:to>
+                                        <p:strVal val="visible"/>
+                                      </p:to>
+                                    </p:set>
+                                    <p:animEffect transition="in" filter="fade">
+                                      <p:cBhvr>
+                                        <p:cTn id="37" dur="500"/>
+                                        <p:tgtEl>
+                                          <p:spTgt spid="12"/>
+                                        </p:tgtEl>
+                                      </p:cBhvr>
+                                    </p:animEffect>
+                                  </p:childTnLst>
+                                </p:cTn>
+                              </p:par>
+                              <p:par>
+                                <p:cTn id="38" presetID="10" presetClass="entr" presetSubtype="0" fill="hold" grpId="0" nodeType="withEffect">
+                                  <p:stCondLst>
+                                    <p:cond delay="0"/>
+                                  </p:stCondLst>
+                                  <p:childTnLst>
+                                    <p:set>
+                                      <p:cBhvr>
+                                        <p:cTn id="39" dur="1" fill="hold">
+                                          <p:stCondLst>
+                                            <p:cond delay="0"/>
+                                          </p:stCondLst>
+                                        </p:cTn>
+                                        <p:tgtEl>
+                                          <p:spTgt spid="13"/>
+                                        </p:tgtEl>
+                                        <p:attrNameLst>
+                                          <p:attrName>style.visibility</p:attrName>
+                                        </p:attrNameLst>
+                                      </p:cBhvr>
+                                      <p:to>
+                                        <p:strVal val="visible"/>
+                                      </p:to>
+                                    </p:set>
+                                    <p:animEffect transition="in" filter="fade">
+                                      <p:cBhvr>
+                                        <p:cTn id="40" dur="500"/>
+                                        <p:tgtEl>
+                                          <p:spTgt spid="13"/>
+                                        </p:tgtEl>
+                                      </p:cBhvr>
+                                    </p:animEffect>
+                                  </p:childTnLst>
+                                </p:cTn>
+                              </p:par>
+                              <p:par>
+                                <p:cTn id="41" presetID="10" presetClass="entr" presetSubtype="0" fill="hold" grpId="0" nodeType="withEffect">
+                                  <p:stCondLst>
+                                    <p:cond delay="0"/>
+                                  </p:stCondLst>
+                                  <p:childTnLst>
+                                    <p:set>
+                                      <p:cBhvr>
+                                        <p:cTn id="42" dur="1" fill="hold">
+                                          <p:stCondLst>
+                                            <p:cond delay="0"/>
+                                          </p:stCondLst>
+                                        </p:cTn>
+                                        <p:tgtEl>
+                                          <p:spTgt spid="14"/>
+                                        </p:tgtEl>
+                                        <p:attrNameLst>
+                                          <p:attrName>style.visibility</p:attrName>
+                                        </p:attrNameLst>
+                                      </p:cBhvr>
+                                      <p:to>
+                                        <p:strVal val="visible"/>
+                                      </p:to>
+                                    </p:set>
+                                    <p:animEffect transition="in" filter="fade">
+                                      <p:cBhvr>
+                                        <p:cTn id="43" dur="500"/>
+                                        <p:tgtEl>
+                                          <p:spTgt spid="14"/>
+                                        </p:tgtEl>
+                                      </p:cBhvr>
+                                    </p:animEffect>
+                                  </p:childTnLst>
+                                </p:cTn>
+                              </p:par>
+                              <p:par>
+                                <p:cTn id="44" presetID="10" presetClass="entr" presetSubtype="0" fill="hold" grpId="0" nodeType="withEffect">
+                                  <p:stCondLst>
+                                    <p:cond delay="0"/>
+                                  </p:stCondLst>
+                                  <p:childTnLst>
+                                    <p:set>
+                                      <p:cBhvr>
+                                        <p:cTn id="45" dur="1" fill="hold">
+                                          <p:stCondLst>
+                                            <p:cond delay="0"/>
+                                          </p:stCondLst>
+                                        </p:cTn>
+                                        <p:tgtEl>
+                                          <p:spTgt spid="15"/>
+                                        </p:tgtEl>
+                                        <p:attrNameLst>
+                                          <p:attrName>style.visibility</p:attrName>
+                                        </p:attrNameLst>
+                                      </p:cBhvr>
+                                      <p:to>
+                                        <p:strVal val="visible"/>
+                                      </p:to>
+                                    </p:set>
+                                    <p:animEffect transition="in" filter="fade">
+                                      <p:cBhvr>
+                                        <p:cTn id="46" dur="500"/>
+                                        <p:tgtEl>
+                                          <p:spTgt spid="15"/>
+                                        </p:tgtEl>
+                                      </p:cBhvr>
+                                    </p:animEffect>
+                                  </p:childTnLst>
+                                </p:cTn>
+                              </p:par>
+                              <p:par>
+                                <p:cTn id="47" presetID="10" presetClass="entr" presetSubtype="0" fill="hold" grpId="0" nodeType="withEffect">
+                                  <p:stCondLst>
+                                    <p:cond delay="0"/>
+                                  </p:stCondLst>
+                                  <p:childTnLst>
+                                    <p:set>
+                                      <p:cBhvr>
+                                        <p:cTn id="48" dur="1" fill="hold">
+                                          <p:stCondLst>
+                                            <p:cond delay="0"/>
+                                          </p:stCondLst>
+                                        </p:cTn>
+                                        <p:tgtEl>
+                                          <p:spTgt spid="16"/>
+                                        </p:tgtEl>
+                                        <p:attrNameLst>
+                                          <p:attrName>style.visibility</p:attrName>
+                                        </p:attrNameLst>
+                                      </p:cBhvr>
+                                      <p:to>
+                                        <p:strVal val="visible"/>
+                                      </p:to>
+                                    </p:set>
+                                    <p:animEffect transition="in" filter="fade">
+                                      <p:cBhvr>
+                                        <p:cTn id="49" dur="500"/>
+                                        <p:tgtEl>
+                                          <p:spTgt spid="16"/>
+                                        </p:tgtEl>
+                                      </p:cBhvr>
+                                    </p:animEffect>
+                                  </p:childTnLst>
+                                </p:cTn>
+                              </p:par>
+                            </p:childTnLst>
+                          </p:cTn>
+                        </p:par>
+                      </p:childTnLst>
+                    </p:cTn>
+                  </p:par>
+                  <p:par>
+                    <p:cTn id="50" fill="hold">
+                      <p:stCondLst>
+                        <p:cond delay="indefinite"/>
+                      </p:stCondLst>
+                      <p:childTnLst>
+                        <p:par>
+                          <p:cTn id="51" fill="hold">
+                            <p:stCondLst>
+                              <p:cond delay="0"/>
+                            </p:stCondLst>
+                            <p:childTnLst>
+                              <p:par>
+                                <p:cTn id="52" presetID="1" presetClass="entr" presetSubtype="0" fill="hold" nodeType="clickEffect">
+                                  <p:stCondLst>
+                                    <p:cond delay="0"/>
+                                  </p:stCondLst>
+                                  <p:childTnLst>
+                                    <p:set>
+                                      <p:cBhvr>
+                                        <p:cTn id="53" dur="1" fill="hold">
+                                          <p:stCondLst>
+                                            <p:cond delay="0"/>
+                                          </p:stCondLst>
+                                        </p:cTn>
+                                        <p:tgtEl>
+                                          <p:spTgt spid="18"/>
+                                        </p:tgtEl>
+                                        <p:attrNameLst>
+                                          <p:attrName>style.visibility</p:attrName>
+                                        </p:attrNameLst>
+                                      </p:cBhvr>
+                                      <p:to>
+                                        <p:strVal val="visible"/>
+                                      </p:to>
+                                    </p:set>
+                                  </p:childTnLst>
+                                </p:cTn>
+                              </p:par>
+                            </p:childTnLst>
+                          </p:cTn>
+                        </p:par>
+                      </p:childTnLst>
+                    </p:cTn>
+                  </p:par>
+                </p:childTnLst>
+              </p:cTn>
+              <p:prevCondLst>
+                <p:cond evt="onPrev" delay="0">
+                  <p:tgtEl>
+                    <p:sldTgt/>
+                  </p:tgtEl>
+                </p:cond>
+              </p:prevCondLst>
+              <p:nextCondLst>
+                <p:cond evt="onNext" delay="0">
+                  <p:tgtEl>
+                    <p:sldTgt/>
+                  </p:tgtEl>
+                </p:cond>
+              </p:nextCondLst>
+            </p:seq>
+          </p:childTnLst>
+        </p:cTn>
+      </p:par>
+    </p:tnLst>
+    <p:bldLst>
+      <p:bldP spid="5" grpId="0"/>
+      <p:bldP spid="6" grpId="0" animBg="1"/>
+      <p:bldP spid="7" grpId="0" animBg="1"/>
+      <p:bldP spid="8" grpId="0"/>
+      <p:bldP spid="9" grpId="0" animBg="1"/>
+      <p:bldP spid="10" grpId="0" animBg="1"/>
+      <p:bldP spid="11" grpId="0"/>
+      <p:bldP spid="12" grpId="0" animBg="1"/>
+      <p:bldP spid="13" grpId="0"/>
+      <p:bldP spid="14" grpId="0" animBg="1"/>
+      <p:bldP spid="15" grpId="0" animBg="1"/>
+      <p:bldP spid="16" grpId="0"/>
+      <p:bldP spid="4" grpId="0" animBg="1"/>
+    </p:bldLst>
+  </p:timing>
 </p:sld>
 </file>
 
@@ -8585,7 +11392,9 @@
             </a:schemeClr>
           </a:solidFill>
           <a:ln>
-            <a:noFill/>
+            <a:solidFill>
+              <a:schemeClr val="tx1"/>
+            </a:solidFill>
           </a:ln>
         </p:spPr>
         <p:style>
@@ -8660,7 +11469,9 @@
             </a:schemeClr>
           </a:solidFill>
           <a:ln>
-            <a:noFill/>
+            <a:solidFill>
+              <a:schemeClr val="tx1"/>
+            </a:solidFill>
           </a:ln>
         </p:spPr>
         <p:style>
@@ -8723,7 +11534,9 @@
             </a:schemeClr>
           </a:solidFill>
           <a:ln>
-            <a:noFill/>
+            <a:solidFill>
+              <a:schemeClr val="tx1"/>
+            </a:solidFill>
           </a:ln>
         </p:spPr>
         <p:style>
@@ -8785,7 +11598,9 @@
             </a:schemeClr>
           </a:solidFill>
           <a:ln>
-            <a:noFill/>
+            <a:solidFill>
+              <a:schemeClr val="tx1"/>
+            </a:solidFill>
           </a:ln>
         </p:spPr>
         <p:style>
@@ -8848,7 +11663,9 @@
             </a:schemeClr>
           </a:solidFill>
           <a:ln>
-            <a:noFill/>
+            <a:solidFill>
+              <a:schemeClr val="tx1"/>
+            </a:solidFill>
           </a:ln>
         </p:spPr>
         <p:style>
@@ -8956,7 +11773,9 @@
             </a:schemeClr>
           </a:solidFill>
           <a:ln>
-            <a:noFill/>
+            <a:solidFill>
+              <a:schemeClr val="tx1"/>
+            </a:solidFill>
           </a:ln>
         </p:spPr>
         <p:style>
@@ -9070,6 +11889,9 @@
             <a:avLst/>
           </a:prstGeom>
           <a:ln>
+            <a:solidFill>
+              <a:schemeClr val="tx1"/>
+            </a:solidFill>
             <a:tailEnd type="triangle"/>
           </a:ln>
         </p:spPr>
@@ -9113,6 +11935,9 @@
             <a:avLst/>
           </a:prstGeom>
           <a:ln>
+            <a:solidFill>
+              <a:schemeClr val="tx1"/>
+            </a:solidFill>
             <a:tailEnd type="triangle"/>
           </a:ln>
         </p:spPr>
@@ -9156,6 +11981,9 @@
             <a:avLst/>
           </a:prstGeom>
           <a:ln>
+            <a:solidFill>
+              <a:schemeClr val="tx1"/>
+            </a:solidFill>
             <a:tailEnd type="triangle"/>
           </a:ln>
         </p:spPr>
@@ -9199,6 +12027,9 @@
             <a:avLst/>
           </a:prstGeom>
           <a:ln>
+            <a:solidFill>
+              <a:schemeClr val="tx1"/>
+            </a:solidFill>
             <a:tailEnd type="triangle"/>
           </a:ln>
         </p:spPr>
@@ -9245,7 +12076,9 @@
             </a:schemeClr>
           </a:solidFill>
           <a:ln>
-            <a:noFill/>
+            <a:solidFill>
+              <a:schemeClr val="tx1"/>
+            </a:solidFill>
           </a:ln>
         </p:spPr>
         <p:style>
@@ -9308,7 +12141,9 @@
             </a:schemeClr>
           </a:solidFill>
           <a:ln>
-            <a:noFill/>
+            <a:solidFill>
+              <a:schemeClr val="tx1"/>
+            </a:solidFill>
           </a:ln>
         </p:spPr>
         <p:style>
@@ -9371,7 +12206,9 @@
             </a:schemeClr>
           </a:solidFill>
           <a:ln>
-            <a:noFill/>
+            <a:solidFill>
+              <a:schemeClr val="tx1"/>
+            </a:solidFill>
           </a:ln>
         </p:spPr>
         <p:style>
@@ -9442,7 +12279,9 @@
             </a:schemeClr>
           </a:solidFill>
           <a:ln>
-            <a:noFill/>
+            <a:solidFill>
+              <a:schemeClr val="tx1"/>
+            </a:solidFill>
           </a:ln>
         </p:spPr>
         <p:style>
@@ -9501,6 +12340,9 @@
             <a:avLst/>
           </a:prstGeom>
           <a:ln>
+            <a:solidFill>
+              <a:schemeClr val="tx1"/>
+            </a:solidFill>
             <a:tailEnd type="triangle"/>
           </a:ln>
         </p:spPr>
@@ -9543,6 +12385,9 @@
             <a:avLst/>
           </a:prstGeom>
           <a:ln>
+            <a:solidFill>
+              <a:schemeClr val="tx1"/>
+            </a:solidFill>
             <a:tailEnd type="triangle"/>
           </a:ln>
         </p:spPr>
@@ -9585,6 +12430,9 @@
             <a:avLst/>
           </a:prstGeom>
           <a:ln>
+            <a:solidFill>
+              <a:schemeClr val="tx1"/>
+            </a:solidFill>
             <a:tailEnd type="triangle"/>
           </a:ln>
         </p:spPr>
@@ -9627,6 +12475,9 @@
             <a:avLst/>
           </a:prstGeom>
           <a:ln>
+            <a:solidFill>
+              <a:schemeClr val="tx1"/>
+            </a:solidFill>
             <a:tailEnd type="triangle"/>
           </a:ln>
         </p:spPr>
@@ -9673,7 +12524,9 @@
             </a:schemeClr>
           </a:solidFill>
           <a:ln>
-            <a:noFill/>
+            <a:solidFill>
+              <a:schemeClr val="tx1"/>
+            </a:solidFill>
           </a:ln>
         </p:spPr>
         <p:style>
@@ -9735,7 +12588,9 @@
             </a:schemeClr>
           </a:solidFill>
           <a:ln>
-            <a:noFill/>
+            <a:solidFill>
+              <a:schemeClr val="tx1"/>
+            </a:solidFill>
           </a:ln>
         </p:spPr>
         <p:style>
@@ -9798,7 +12653,9 @@
             </a:schemeClr>
           </a:solidFill>
           <a:ln>
-            <a:noFill/>
+            <a:solidFill>
+              <a:schemeClr val="tx1"/>
+            </a:solidFill>
           </a:ln>
         </p:spPr>
         <p:style>
@@ -9874,7 +12731,9 @@
             </a:schemeClr>
           </a:solidFill>
           <a:ln>
-            <a:noFill/>
+            <a:solidFill>
+              <a:schemeClr val="tx1"/>
+            </a:solidFill>
           </a:ln>
         </p:spPr>
         <p:style>
@@ -9937,7 +12796,9 @@
             </a:schemeClr>
           </a:solidFill>
           <a:ln>
-            <a:noFill/>
+            <a:solidFill>
+              <a:schemeClr val="tx1"/>
+            </a:solidFill>
           </a:ln>
         </p:spPr>
         <p:style>
@@ -10010,6 +12871,9 @@
             <a:avLst/>
           </a:prstGeom>
           <a:ln>
+            <a:solidFill>
+              <a:schemeClr val="tx1"/>
+            </a:solidFill>
             <a:tailEnd type="triangle"/>
           </a:ln>
         </p:spPr>
@@ -10055,6 +12919,9 @@
             </a:avLst>
           </a:prstGeom>
           <a:ln>
+            <a:solidFill>
+              <a:schemeClr val="tx1"/>
+            </a:solidFill>
             <a:tailEnd type="triangle"/>
           </a:ln>
         </p:spPr>
@@ -10098,6 +12965,9 @@
             <a:avLst/>
           </a:prstGeom>
           <a:ln>
+            <a:solidFill>
+              <a:schemeClr val="tx1"/>
+            </a:solidFill>
             <a:tailEnd type="triangle"/>
           </a:ln>
         </p:spPr>
@@ -10141,6 +13011,9 @@
             <a:avLst/>
           </a:prstGeom>
           <a:ln>
+            <a:solidFill>
+              <a:schemeClr val="tx1"/>
+            </a:solidFill>
             <a:tailEnd type="triangle"/>
           </a:ln>
         </p:spPr>
@@ -10203,9 +13076,31 @@
                     </a:srgbClr>
                   </a:outerShdw>
                 </a:effectLst>
+                <a:hlinkClick r:id="rId2">
+                  <a:extLst>
+                    <a:ext uri="{A12FA001-AC4F-418D-AE19-62706E023703}">
+                      <ahyp:hlinkClr xmlns:ahyp="http://schemas.microsoft.com/office/drawing/2018/hyperlinkcolor" val="tx"/>
+                    </a:ext>
+                  </a:extLst>
+                </a:hlinkClick>
               </a:rPr>
               <a:t>http://35.180.125.72:3000/</a:t>
             </a:r>
+            <a:endParaRPr lang="fr-FR" sz="2800" b="1" i="1" dirty="0">
+              <a:solidFill>
+                <a:schemeClr val="accent6">
+                  <a:lumMod val="60000"/>
+                  <a:lumOff val="40000"/>
+                </a:schemeClr>
+              </a:solidFill>
+              <a:effectLst>
+                <a:outerShdw blurRad="38100" dist="38100" dir="2700000" algn="tl">
+                  <a:srgbClr val="000000">
+                    <a:alpha val="43137"/>
+                  </a:srgbClr>
+                </a:outerShdw>
+              </a:effectLst>
+            </a:endParaRPr>
           </a:p>
         </p:txBody>
       </p:sp>
@@ -10219,6 +13114,1368 @@
   <p:clrMapOvr>
     <a:masterClrMapping/>
   </p:clrMapOvr>
+  <p:timing>
+    <p:tnLst>
+      <p:par>
+        <p:cTn id="1" dur="indefinite" restart="never" nodeType="tmRoot">
+          <p:childTnLst>
+            <p:seq concurrent="1" nextAc="seek">
+              <p:cTn id="2" dur="indefinite" nodeType="mainSeq">
+                <p:childTnLst>
+                  <p:par>
+                    <p:cTn id="3" fill="hold">
+                      <p:stCondLst>
+                        <p:cond delay="indefinite"/>
+                      </p:stCondLst>
+                      <p:childTnLst>
+                        <p:par>
+                          <p:cTn id="4" fill="hold">
+                            <p:stCondLst>
+                              <p:cond delay="0"/>
+                            </p:stCondLst>
+                            <p:childTnLst>
+                              <p:par>
+                                <p:cTn id="5" presetID="16" presetClass="entr" presetSubtype="21" fill="hold" grpId="0" nodeType="clickEffect">
+                                  <p:stCondLst>
+                                    <p:cond delay="0"/>
+                                  </p:stCondLst>
+                                  <p:childTnLst>
+                                    <p:set>
+                                      <p:cBhvr>
+                                        <p:cTn id="6" dur="1" fill="hold">
+                                          <p:stCondLst>
+                                            <p:cond delay="0"/>
+                                          </p:stCondLst>
+                                        </p:cTn>
+                                        <p:tgtEl>
+                                          <p:spTgt spid="3"/>
+                                        </p:tgtEl>
+                                        <p:attrNameLst>
+                                          <p:attrName>style.visibility</p:attrName>
+                                        </p:attrNameLst>
+                                      </p:cBhvr>
+                                      <p:to>
+                                        <p:strVal val="visible"/>
+                                      </p:to>
+                                    </p:set>
+                                    <p:animEffect transition="in" filter="barn(inVertical)">
+                                      <p:cBhvr>
+                                        <p:cTn id="7" dur="500"/>
+                                        <p:tgtEl>
+                                          <p:spTgt spid="3"/>
+                                        </p:tgtEl>
+                                      </p:cBhvr>
+                                    </p:animEffect>
+                                  </p:childTnLst>
+                                </p:cTn>
+                              </p:par>
+                            </p:childTnLst>
+                          </p:cTn>
+                        </p:par>
+                      </p:childTnLst>
+                    </p:cTn>
+                  </p:par>
+                  <p:par>
+                    <p:cTn id="8" fill="hold">
+                      <p:stCondLst>
+                        <p:cond delay="indefinite"/>
+                      </p:stCondLst>
+                      <p:childTnLst>
+                        <p:par>
+                          <p:cTn id="9" fill="hold">
+                            <p:stCondLst>
+                              <p:cond delay="0"/>
+                            </p:stCondLst>
+                            <p:childTnLst>
+                              <p:par>
+                                <p:cTn id="10" presetID="22" presetClass="entr" presetSubtype="4" fill="hold" nodeType="clickEffect">
+                                  <p:stCondLst>
+                                    <p:cond delay="0"/>
+                                  </p:stCondLst>
+                                  <p:childTnLst>
+                                    <p:set>
+                                      <p:cBhvr>
+                                        <p:cTn id="11" dur="1" fill="hold">
+                                          <p:stCondLst>
+                                            <p:cond delay="0"/>
+                                          </p:stCondLst>
+                                        </p:cTn>
+                                        <p:tgtEl>
+                                          <p:spTgt spid="10"/>
+                                        </p:tgtEl>
+                                        <p:attrNameLst>
+                                          <p:attrName>style.visibility</p:attrName>
+                                        </p:attrNameLst>
+                                      </p:cBhvr>
+                                      <p:to>
+                                        <p:strVal val="visible"/>
+                                      </p:to>
+                                    </p:set>
+                                    <p:animEffect transition="in" filter="wipe(down)">
+                                      <p:cBhvr>
+                                        <p:cTn id="12" dur="500"/>
+                                        <p:tgtEl>
+                                          <p:spTgt spid="10"/>
+                                        </p:tgtEl>
+                                      </p:cBhvr>
+                                    </p:animEffect>
+                                  </p:childTnLst>
+                                </p:cTn>
+                              </p:par>
+                              <p:par>
+                                <p:cTn id="13" presetID="22" presetClass="entr" presetSubtype="4" fill="hold" grpId="0" nodeType="withEffect">
+                                  <p:stCondLst>
+                                    <p:cond delay="0"/>
+                                  </p:stCondLst>
+                                  <p:childTnLst>
+                                    <p:set>
+                                      <p:cBhvr>
+                                        <p:cTn id="14" dur="1" fill="hold">
+                                          <p:stCondLst>
+                                            <p:cond delay="0"/>
+                                          </p:stCondLst>
+                                        </p:cTn>
+                                        <p:tgtEl>
+                                          <p:spTgt spid="4"/>
+                                        </p:tgtEl>
+                                        <p:attrNameLst>
+                                          <p:attrName>style.visibility</p:attrName>
+                                        </p:attrNameLst>
+                                      </p:cBhvr>
+                                      <p:to>
+                                        <p:strVal val="visible"/>
+                                      </p:to>
+                                    </p:set>
+                                    <p:animEffect transition="in" filter="wipe(down)">
+                                      <p:cBhvr>
+                                        <p:cTn id="15" dur="500"/>
+                                        <p:tgtEl>
+                                          <p:spTgt spid="4"/>
+                                        </p:tgtEl>
+                                      </p:cBhvr>
+                                    </p:animEffect>
+                                  </p:childTnLst>
+                                </p:cTn>
+                              </p:par>
+                            </p:childTnLst>
+                          </p:cTn>
+                        </p:par>
+                      </p:childTnLst>
+                    </p:cTn>
+                  </p:par>
+                  <p:par>
+                    <p:cTn id="16" fill="hold">
+                      <p:stCondLst>
+                        <p:cond delay="indefinite"/>
+                      </p:stCondLst>
+                      <p:childTnLst>
+                        <p:par>
+                          <p:cTn id="17" fill="hold">
+                            <p:stCondLst>
+                              <p:cond delay="0"/>
+                            </p:stCondLst>
+                            <p:childTnLst>
+                              <p:par>
+                                <p:cTn id="18" presetID="22" presetClass="entr" presetSubtype="4" fill="hold" nodeType="clickEffect">
+                                  <p:stCondLst>
+                                    <p:cond delay="0"/>
+                                  </p:stCondLst>
+                                  <p:childTnLst>
+                                    <p:set>
+                                      <p:cBhvr>
+                                        <p:cTn id="19" dur="1" fill="hold">
+                                          <p:stCondLst>
+                                            <p:cond delay="0"/>
+                                          </p:stCondLst>
+                                        </p:cTn>
+                                        <p:tgtEl>
+                                          <p:spTgt spid="15"/>
+                                        </p:tgtEl>
+                                        <p:attrNameLst>
+                                          <p:attrName>style.visibility</p:attrName>
+                                        </p:attrNameLst>
+                                      </p:cBhvr>
+                                      <p:to>
+                                        <p:strVal val="visible"/>
+                                      </p:to>
+                                    </p:set>
+                                    <p:animEffect transition="in" filter="wipe(down)">
+                                      <p:cBhvr>
+                                        <p:cTn id="20" dur="500"/>
+                                        <p:tgtEl>
+                                          <p:spTgt spid="15"/>
+                                        </p:tgtEl>
+                                      </p:cBhvr>
+                                    </p:animEffect>
+                                  </p:childTnLst>
+                                </p:cTn>
+                              </p:par>
+                              <p:par>
+                                <p:cTn id="21" presetID="22" presetClass="entr" presetSubtype="4" fill="hold" grpId="0" nodeType="withEffect">
+                                  <p:stCondLst>
+                                    <p:cond delay="0"/>
+                                  </p:stCondLst>
+                                  <p:childTnLst>
+                                    <p:set>
+                                      <p:cBhvr>
+                                        <p:cTn id="22" dur="1" fill="hold">
+                                          <p:stCondLst>
+                                            <p:cond delay="0"/>
+                                          </p:stCondLst>
+                                        </p:cTn>
+                                        <p:tgtEl>
+                                          <p:spTgt spid="7"/>
+                                        </p:tgtEl>
+                                        <p:attrNameLst>
+                                          <p:attrName>style.visibility</p:attrName>
+                                        </p:attrNameLst>
+                                      </p:cBhvr>
+                                      <p:to>
+                                        <p:strVal val="visible"/>
+                                      </p:to>
+                                    </p:set>
+                                    <p:animEffect transition="in" filter="wipe(down)">
+                                      <p:cBhvr>
+                                        <p:cTn id="23" dur="500"/>
+                                        <p:tgtEl>
+                                          <p:spTgt spid="7"/>
+                                        </p:tgtEl>
+                                      </p:cBhvr>
+                                    </p:animEffect>
+                                  </p:childTnLst>
+                                </p:cTn>
+                              </p:par>
+                            </p:childTnLst>
+                          </p:cTn>
+                        </p:par>
+                      </p:childTnLst>
+                    </p:cTn>
+                  </p:par>
+                  <p:par>
+                    <p:cTn id="24" fill="hold">
+                      <p:stCondLst>
+                        <p:cond delay="indefinite"/>
+                      </p:stCondLst>
+                      <p:childTnLst>
+                        <p:par>
+                          <p:cTn id="25" fill="hold">
+                            <p:stCondLst>
+                              <p:cond delay="0"/>
+                            </p:stCondLst>
+                            <p:childTnLst>
+                              <p:par>
+                                <p:cTn id="26" presetID="22" presetClass="entr" presetSubtype="4" fill="hold" nodeType="clickEffect">
+                                  <p:stCondLst>
+                                    <p:cond delay="0"/>
+                                  </p:stCondLst>
+                                  <p:childTnLst>
+                                    <p:set>
+                                      <p:cBhvr>
+                                        <p:cTn id="27" dur="1" fill="hold">
+                                          <p:stCondLst>
+                                            <p:cond delay="0"/>
+                                          </p:stCondLst>
+                                        </p:cTn>
+                                        <p:tgtEl>
+                                          <p:spTgt spid="12"/>
+                                        </p:tgtEl>
+                                        <p:attrNameLst>
+                                          <p:attrName>style.visibility</p:attrName>
+                                        </p:attrNameLst>
+                                      </p:cBhvr>
+                                      <p:to>
+                                        <p:strVal val="visible"/>
+                                      </p:to>
+                                    </p:set>
+                                    <p:animEffect transition="in" filter="wipe(down)">
+                                      <p:cBhvr>
+                                        <p:cTn id="28" dur="500"/>
+                                        <p:tgtEl>
+                                          <p:spTgt spid="12"/>
+                                        </p:tgtEl>
+                                      </p:cBhvr>
+                                    </p:animEffect>
+                                  </p:childTnLst>
+                                </p:cTn>
+                              </p:par>
+                              <p:par>
+                                <p:cTn id="29" presetID="22" presetClass="entr" presetSubtype="4" fill="hold" grpId="0" nodeType="withEffect">
+                                  <p:stCondLst>
+                                    <p:cond delay="0"/>
+                                  </p:stCondLst>
+                                  <p:childTnLst>
+                                    <p:set>
+                                      <p:cBhvr>
+                                        <p:cTn id="30" dur="1" fill="hold">
+                                          <p:stCondLst>
+                                            <p:cond delay="0"/>
+                                          </p:stCondLst>
+                                        </p:cTn>
+                                        <p:tgtEl>
+                                          <p:spTgt spid="6"/>
+                                        </p:tgtEl>
+                                        <p:attrNameLst>
+                                          <p:attrName>style.visibility</p:attrName>
+                                        </p:attrNameLst>
+                                      </p:cBhvr>
+                                      <p:to>
+                                        <p:strVal val="visible"/>
+                                      </p:to>
+                                    </p:set>
+                                    <p:animEffect transition="in" filter="wipe(down)">
+                                      <p:cBhvr>
+                                        <p:cTn id="31" dur="500"/>
+                                        <p:tgtEl>
+                                          <p:spTgt spid="6"/>
+                                        </p:tgtEl>
+                                      </p:cBhvr>
+                                    </p:animEffect>
+                                  </p:childTnLst>
+                                </p:cTn>
+                              </p:par>
+                            </p:childTnLst>
+                          </p:cTn>
+                        </p:par>
+                      </p:childTnLst>
+                    </p:cTn>
+                  </p:par>
+                  <p:par>
+                    <p:cTn id="32" fill="hold">
+                      <p:stCondLst>
+                        <p:cond delay="indefinite"/>
+                      </p:stCondLst>
+                      <p:childTnLst>
+                        <p:par>
+                          <p:cTn id="33" fill="hold">
+                            <p:stCondLst>
+                              <p:cond delay="0"/>
+                            </p:stCondLst>
+                            <p:childTnLst>
+                              <p:par>
+                                <p:cTn id="34" presetID="22" presetClass="entr" presetSubtype="4" fill="hold" nodeType="clickEffect">
+                                  <p:stCondLst>
+                                    <p:cond delay="0"/>
+                                  </p:stCondLst>
+                                  <p:childTnLst>
+                                    <p:set>
+                                      <p:cBhvr>
+                                        <p:cTn id="35" dur="1" fill="hold">
+                                          <p:stCondLst>
+                                            <p:cond delay="0"/>
+                                          </p:stCondLst>
+                                        </p:cTn>
+                                        <p:tgtEl>
+                                          <p:spTgt spid="17"/>
+                                        </p:tgtEl>
+                                        <p:attrNameLst>
+                                          <p:attrName>style.visibility</p:attrName>
+                                        </p:attrNameLst>
+                                      </p:cBhvr>
+                                      <p:to>
+                                        <p:strVal val="visible"/>
+                                      </p:to>
+                                    </p:set>
+                                    <p:animEffect transition="in" filter="wipe(down)">
+                                      <p:cBhvr>
+                                        <p:cTn id="36" dur="500"/>
+                                        <p:tgtEl>
+                                          <p:spTgt spid="17"/>
+                                        </p:tgtEl>
+                                      </p:cBhvr>
+                                    </p:animEffect>
+                                  </p:childTnLst>
+                                </p:cTn>
+                              </p:par>
+                              <p:par>
+                                <p:cTn id="37" presetID="22" presetClass="entr" presetSubtype="4" fill="hold" grpId="0" nodeType="withEffect">
+                                  <p:stCondLst>
+                                    <p:cond delay="0"/>
+                                  </p:stCondLst>
+                                  <p:childTnLst>
+                                    <p:set>
+                                      <p:cBhvr>
+                                        <p:cTn id="38" dur="1" fill="hold">
+                                          <p:stCondLst>
+                                            <p:cond delay="0"/>
+                                          </p:stCondLst>
+                                        </p:cTn>
+                                        <p:tgtEl>
+                                          <p:spTgt spid="8"/>
+                                        </p:tgtEl>
+                                        <p:attrNameLst>
+                                          <p:attrName>style.visibility</p:attrName>
+                                        </p:attrNameLst>
+                                      </p:cBhvr>
+                                      <p:to>
+                                        <p:strVal val="visible"/>
+                                      </p:to>
+                                    </p:set>
+                                    <p:animEffect transition="in" filter="wipe(down)">
+                                      <p:cBhvr>
+                                        <p:cTn id="39" dur="500"/>
+                                        <p:tgtEl>
+                                          <p:spTgt spid="8"/>
+                                        </p:tgtEl>
+                                      </p:cBhvr>
+                                    </p:animEffect>
+                                  </p:childTnLst>
+                                </p:cTn>
+                              </p:par>
+                            </p:childTnLst>
+                          </p:cTn>
+                        </p:par>
+                      </p:childTnLst>
+                    </p:cTn>
+                  </p:par>
+                  <p:par>
+                    <p:cTn id="40" fill="hold">
+                      <p:stCondLst>
+                        <p:cond delay="indefinite"/>
+                      </p:stCondLst>
+                      <p:childTnLst>
+                        <p:par>
+                          <p:cTn id="41" fill="hold">
+                            <p:stCondLst>
+                              <p:cond delay="0"/>
+                            </p:stCondLst>
+                            <p:childTnLst>
+                              <p:par>
+                                <p:cTn id="42" presetID="16" presetClass="entr" presetSubtype="21" fill="hold" grpId="0" nodeType="clickEffect">
+                                  <p:stCondLst>
+                                    <p:cond delay="0"/>
+                                  </p:stCondLst>
+                                  <p:childTnLst>
+                                    <p:set>
+                                      <p:cBhvr>
+                                        <p:cTn id="43" dur="1" fill="hold">
+                                          <p:stCondLst>
+                                            <p:cond delay="0"/>
+                                          </p:stCondLst>
+                                        </p:cTn>
+                                        <p:tgtEl>
+                                          <p:spTgt spid="5"/>
+                                        </p:tgtEl>
+                                        <p:attrNameLst>
+                                          <p:attrName>style.visibility</p:attrName>
+                                        </p:attrNameLst>
+                                      </p:cBhvr>
+                                      <p:to>
+                                        <p:strVal val="visible"/>
+                                      </p:to>
+                                    </p:set>
+                                    <p:animEffect transition="in" filter="barn(inVertical)">
+                                      <p:cBhvr>
+                                        <p:cTn id="44" dur="500"/>
+                                        <p:tgtEl>
+                                          <p:spTgt spid="5"/>
+                                        </p:tgtEl>
+                                      </p:cBhvr>
+                                    </p:animEffect>
+                                  </p:childTnLst>
+                                </p:cTn>
+                              </p:par>
+                            </p:childTnLst>
+                          </p:cTn>
+                        </p:par>
+                      </p:childTnLst>
+                    </p:cTn>
+                  </p:par>
+                  <p:par>
+                    <p:cTn id="45" fill="hold">
+                      <p:stCondLst>
+                        <p:cond delay="indefinite"/>
+                      </p:stCondLst>
+                      <p:childTnLst>
+                        <p:par>
+                          <p:cTn id="46" fill="hold">
+                            <p:stCondLst>
+                              <p:cond delay="0"/>
+                            </p:stCondLst>
+                            <p:childTnLst>
+                              <p:par>
+                                <p:cTn id="47" presetID="22" presetClass="entr" presetSubtype="4" fill="hold" nodeType="clickEffect">
+                                  <p:stCondLst>
+                                    <p:cond delay="0"/>
+                                  </p:stCondLst>
+                                  <p:childTnLst>
+                                    <p:set>
+                                      <p:cBhvr>
+                                        <p:cTn id="48" dur="1" fill="hold">
+                                          <p:stCondLst>
+                                            <p:cond delay="0"/>
+                                          </p:stCondLst>
+                                        </p:cTn>
+                                        <p:tgtEl>
+                                          <p:spTgt spid="25"/>
+                                        </p:tgtEl>
+                                        <p:attrNameLst>
+                                          <p:attrName>style.visibility</p:attrName>
+                                        </p:attrNameLst>
+                                      </p:cBhvr>
+                                      <p:to>
+                                        <p:strVal val="visible"/>
+                                      </p:to>
+                                    </p:set>
+                                    <p:animEffect transition="in" filter="wipe(down)">
+                                      <p:cBhvr>
+                                        <p:cTn id="49" dur="500"/>
+                                        <p:tgtEl>
+                                          <p:spTgt spid="25"/>
+                                        </p:tgtEl>
+                                      </p:cBhvr>
+                                    </p:animEffect>
+                                  </p:childTnLst>
+                                </p:cTn>
+                              </p:par>
+                              <p:par>
+                                <p:cTn id="50" presetID="22" presetClass="entr" presetSubtype="4" fill="hold" grpId="0" nodeType="withEffect">
+                                  <p:stCondLst>
+                                    <p:cond delay="0"/>
+                                  </p:stCondLst>
+                                  <p:childTnLst>
+                                    <p:set>
+                                      <p:cBhvr>
+                                        <p:cTn id="51" dur="1" fill="hold">
+                                          <p:stCondLst>
+                                            <p:cond delay="0"/>
+                                          </p:stCondLst>
+                                        </p:cTn>
+                                        <p:tgtEl>
+                                          <p:spTgt spid="18"/>
+                                        </p:tgtEl>
+                                        <p:attrNameLst>
+                                          <p:attrName>style.visibility</p:attrName>
+                                        </p:attrNameLst>
+                                      </p:cBhvr>
+                                      <p:to>
+                                        <p:strVal val="visible"/>
+                                      </p:to>
+                                    </p:set>
+                                    <p:animEffect transition="in" filter="wipe(down)">
+                                      <p:cBhvr>
+                                        <p:cTn id="52" dur="500"/>
+                                        <p:tgtEl>
+                                          <p:spTgt spid="18"/>
+                                        </p:tgtEl>
+                                      </p:cBhvr>
+                                    </p:animEffect>
+                                  </p:childTnLst>
+                                </p:cTn>
+                              </p:par>
+                            </p:childTnLst>
+                          </p:cTn>
+                        </p:par>
+                      </p:childTnLst>
+                    </p:cTn>
+                  </p:par>
+                  <p:par>
+                    <p:cTn id="53" fill="hold">
+                      <p:stCondLst>
+                        <p:cond delay="indefinite"/>
+                      </p:stCondLst>
+                      <p:childTnLst>
+                        <p:par>
+                          <p:cTn id="54" fill="hold">
+                            <p:stCondLst>
+                              <p:cond delay="0"/>
+                            </p:stCondLst>
+                            <p:childTnLst>
+                              <p:par>
+                                <p:cTn id="55" presetID="22" presetClass="entr" presetSubtype="4" fill="hold" nodeType="clickEffect">
+                                  <p:stCondLst>
+                                    <p:cond delay="0"/>
+                                  </p:stCondLst>
+                                  <p:childTnLst>
+                                    <p:set>
+                                      <p:cBhvr>
+                                        <p:cTn id="56" dur="1" fill="hold">
+                                          <p:stCondLst>
+                                            <p:cond delay="0"/>
+                                          </p:stCondLst>
+                                        </p:cTn>
+                                        <p:tgtEl>
+                                          <p:spTgt spid="29"/>
+                                        </p:tgtEl>
+                                        <p:attrNameLst>
+                                          <p:attrName>style.visibility</p:attrName>
+                                        </p:attrNameLst>
+                                      </p:cBhvr>
+                                      <p:to>
+                                        <p:strVal val="visible"/>
+                                      </p:to>
+                                    </p:set>
+                                    <p:animEffect transition="in" filter="wipe(down)">
+                                      <p:cBhvr>
+                                        <p:cTn id="57" dur="500"/>
+                                        <p:tgtEl>
+                                          <p:spTgt spid="29"/>
+                                        </p:tgtEl>
+                                      </p:cBhvr>
+                                    </p:animEffect>
+                                  </p:childTnLst>
+                                </p:cTn>
+                              </p:par>
+                              <p:par>
+                                <p:cTn id="58" presetID="22" presetClass="entr" presetSubtype="4" fill="hold" grpId="0" nodeType="withEffect">
+                                  <p:stCondLst>
+                                    <p:cond delay="0"/>
+                                  </p:stCondLst>
+                                  <p:childTnLst>
+                                    <p:set>
+                                      <p:cBhvr>
+                                        <p:cTn id="59" dur="1" fill="hold">
+                                          <p:stCondLst>
+                                            <p:cond delay="0"/>
+                                          </p:stCondLst>
+                                        </p:cTn>
+                                        <p:tgtEl>
+                                          <p:spTgt spid="20"/>
+                                        </p:tgtEl>
+                                        <p:attrNameLst>
+                                          <p:attrName>style.visibility</p:attrName>
+                                        </p:attrNameLst>
+                                      </p:cBhvr>
+                                      <p:to>
+                                        <p:strVal val="visible"/>
+                                      </p:to>
+                                    </p:set>
+                                    <p:animEffect transition="in" filter="wipe(down)">
+                                      <p:cBhvr>
+                                        <p:cTn id="60" dur="500"/>
+                                        <p:tgtEl>
+                                          <p:spTgt spid="20"/>
+                                        </p:tgtEl>
+                                      </p:cBhvr>
+                                    </p:animEffect>
+                                  </p:childTnLst>
+                                </p:cTn>
+                              </p:par>
+                            </p:childTnLst>
+                          </p:cTn>
+                        </p:par>
+                      </p:childTnLst>
+                    </p:cTn>
+                  </p:par>
+                  <p:par>
+                    <p:cTn id="61" fill="hold">
+                      <p:stCondLst>
+                        <p:cond delay="indefinite"/>
+                      </p:stCondLst>
+                      <p:childTnLst>
+                        <p:par>
+                          <p:cTn id="62" fill="hold">
+                            <p:stCondLst>
+                              <p:cond delay="0"/>
+                            </p:stCondLst>
+                            <p:childTnLst>
+                              <p:par>
+                                <p:cTn id="63" presetID="22" presetClass="entr" presetSubtype="4" fill="hold" nodeType="clickEffect">
+                                  <p:stCondLst>
+                                    <p:cond delay="0"/>
+                                  </p:stCondLst>
+                                  <p:childTnLst>
+                                    <p:set>
+                                      <p:cBhvr>
+                                        <p:cTn id="64" dur="1" fill="hold">
+                                          <p:stCondLst>
+                                            <p:cond delay="0"/>
+                                          </p:stCondLst>
+                                        </p:cTn>
+                                        <p:tgtEl>
+                                          <p:spTgt spid="27"/>
+                                        </p:tgtEl>
+                                        <p:attrNameLst>
+                                          <p:attrName>style.visibility</p:attrName>
+                                        </p:attrNameLst>
+                                      </p:cBhvr>
+                                      <p:to>
+                                        <p:strVal val="visible"/>
+                                      </p:to>
+                                    </p:set>
+                                    <p:animEffect transition="in" filter="wipe(down)">
+                                      <p:cBhvr>
+                                        <p:cTn id="65" dur="500"/>
+                                        <p:tgtEl>
+                                          <p:spTgt spid="27"/>
+                                        </p:tgtEl>
+                                      </p:cBhvr>
+                                    </p:animEffect>
+                                  </p:childTnLst>
+                                </p:cTn>
+                              </p:par>
+                              <p:par>
+                                <p:cTn id="66" presetID="22" presetClass="entr" presetSubtype="4" fill="hold" grpId="0" nodeType="withEffect">
+                                  <p:stCondLst>
+                                    <p:cond delay="0"/>
+                                  </p:stCondLst>
+                                  <p:childTnLst>
+                                    <p:set>
+                                      <p:cBhvr>
+                                        <p:cTn id="67" dur="1" fill="hold">
+                                          <p:stCondLst>
+                                            <p:cond delay="0"/>
+                                          </p:stCondLst>
+                                        </p:cTn>
+                                        <p:tgtEl>
+                                          <p:spTgt spid="19"/>
+                                        </p:tgtEl>
+                                        <p:attrNameLst>
+                                          <p:attrName>style.visibility</p:attrName>
+                                        </p:attrNameLst>
+                                      </p:cBhvr>
+                                      <p:to>
+                                        <p:strVal val="visible"/>
+                                      </p:to>
+                                    </p:set>
+                                    <p:animEffect transition="in" filter="wipe(down)">
+                                      <p:cBhvr>
+                                        <p:cTn id="68" dur="500"/>
+                                        <p:tgtEl>
+                                          <p:spTgt spid="19"/>
+                                        </p:tgtEl>
+                                      </p:cBhvr>
+                                    </p:animEffect>
+                                  </p:childTnLst>
+                                </p:cTn>
+                              </p:par>
+                            </p:childTnLst>
+                          </p:cTn>
+                        </p:par>
+                      </p:childTnLst>
+                    </p:cTn>
+                  </p:par>
+                  <p:par>
+                    <p:cTn id="69" fill="hold">
+                      <p:stCondLst>
+                        <p:cond delay="indefinite"/>
+                      </p:stCondLst>
+                      <p:childTnLst>
+                        <p:par>
+                          <p:cTn id="70" fill="hold">
+                            <p:stCondLst>
+                              <p:cond delay="0"/>
+                            </p:stCondLst>
+                            <p:childTnLst>
+                              <p:par>
+                                <p:cTn id="71" presetID="22" presetClass="entr" presetSubtype="4" fill="hold" nodeType="clickEffect">
+                                  <p:stCondLst>
+                                    <p:cond delay="0"/>
+                                  </p:stCondLst>
+                                  <p:childTnLst>
+                                    <p:set>
+                                      <p:cBhvr>
+                                        <p:cTn id="72" dur="1" fill="hold">
+                                          <p:stCondLst>
+                                            <p:cond delay="0"/>
+                                          </p:stCondLst>
+                                        </p:cTn>
+                                        <p:tgtEl>
+                                          <p:spTgt spid="31"/>
+                                        </p:tgtEl>
+                                        <p:attrNameLst>
+                                          <p:attrName>style.visibility</p:attrName>
+                                        </p:attrNameLst>
+                                      </p:cBhvr>
+                                      <p:to>
+                                        <p:strVal val="visible"/>
+                                      </p:to>
+                                    </p:set>
+                                    <p:animEffect transition="in" filter="wipe(down)">
+                                      <p:cBhvr>
+                                        <p:cTn id="73" dur="500"/>
+                                        <p:tgtEl>
+                                          <p:spTgt spid="31"/>
+                                        </p:tgtEl>
+                                      </p:cBhvr>
+                                    </p:animEffect>
+                                  </p:childTnLst>
+                                </p:cTn>
+                              </p:par>
+                              <p:par>
+                                <p:cTn id="74" presetID="22" presetClass="entr" presetSubtype="4" fill="hold" grpId="0" nodeType="withEffect">
+                                  <p:stCondLst>
+                                    <p:cond delay="0"/>
+                                  </p:stCondLst>
+                                  <p:childTnLst>
+                                    <p:set>
+                                      <p:cBhvr>
+                                        <p:cTn id="75" dur="1" fill="hold">
+                                          <p:stCondLst>
+                                            <p:cond delay="0"/>
+                                          </p:stCondLst>
+                                        </p:cTn>
+                                        <p:tgtEl>
+                                          <p:spTgt spid="21"/>
+                                        </p:tgtEl>
+                                        <p:attrNameLst>
+                                          <p:attrName>style.visibility</p:attrName>
+                                        </p:attrNameLst>
+                                      </p:cBhvr>
+                                      <p:to>
+                                        <p:strVal val="visible"/>
+                                      </p:to>
+                                    </p:set>
+                                    <p:animEffect transition="in" filter="wipe(down)">
+                                      <p:cBhvr>
+                                        <p:cTn id="76" dur="500"/>
+                                        <p:tgtEl>
+                                          <p:spTgt spid="21"/>
+                                        </p:tgtEl>
+                                      </p:cBhvr>
+                                    </p:animEffect>
+                                  </p:childTnLst>
+                                </p:cTn>
+                              </p:par>
+                            </p:childTnLst>
+                          </p:cTn>
+                        </p:par>
+                      </p:childTnLst>
+                    </p:cTn>
+                  </p:par>
+                  <p:par>
+                    <p:cTn id="77" fill="hold">
+                      <p:stCondLst>
+                        <p:cond delay="indefinite"/>
+                      </p:stCondLst>
+                      <p:childTnLst>
+                        <p:par>
+                          <p:cTn id="78" fill="hold">
+                            <p:stCondLst>
+                              <p:cond delay="0"/>
+                            </p:stCondLst>
+                            <p:childTnLst>
+                              <p:par>
+                                <p:cTn id="79" presetID="10" presetClass="entr" presetSubtype="0" fill="hold" grpId="0" nodeType="clickEffect">
+                                  <p:stCondLst>
+                                    <p:cond delay="0"/>
+                                  </p:stCondLst>
+                                  <p:childTnLst>
+                                    <p:set>
+                                      <p:cBhvr>
+                                        <p:cTn id="80" dur="1" fill="hold">
+                                          <p:stCondLst>
+                                            <p:cond delay="0"/>
+                                          </p:stCondLst>
+                                        </p:cTn>
+                                        <p:tgtEl>
+                                          <p:spTgt spid="32"/>
+                                        </p:tgtEl>
+                                        <p:attrNameLst>
+                                          <p:attrName>style.visibility</p:attrName>
+                                        </p:attrNameLst>
+                                      </p:cBhvr>
+                                      <p:to>
+                                        <p:strVal val="visible"/>
+                                      </p:to>
+                                    </p:set>
+                                    <p:animEffect transition="in" filter="fade">
+                                      <p:cBhvr>
+                                        <p:cTn id="81" dur="500"/>
+                                        <p:tgtEl>
+                                          <p:spTgt spid="32"/>
+                                        </p:tgtEl>
+                                      </p:cBhvr>
+                                    </p:animEffect>
+                                  </p:childTnLst>
+                                </p:cTn>
+                              </p:par>
+                            </p:childTnLst>
+                          </p:cTn>
+                        </p:par>
+                      </p:childTnLst>
+                    </p:cTn>
+                  </p:par>
+                  <p:par>
+                    <p:cTn id="82" fill="hold">
+                      <p:stCondLst>
+                        <p:cond delay="indefinite"/>
+                      </p:stCondLst>
+                      <p:childTnLst>
+                        <p:par>
+                          <p:cTn id="83" fill="hold">
+                            <p:stCondLst>
+                              <p:cond delay="0"/>
+                            </p:stCondLst>
+                            <p:childTnLst>
+                              <p:par>
+                                <p:cTn id="84" presetID="22" presetClass="entr" presetSubtype="4" fill="hold" nodeType="clickEffect">
+                                  <p:stCondLst>
+                                    <p:cond delay="0"/>
+                                  </p:stCondLst>
+                                  <p:childTnLst>
+                                    <p:set>
+                                      <p:cBhvr>
+                                        <p:cTn id="85" dur="1" fill="hold">
+                                          <p:stCondLst>
+                                            <p:cond delay="0"/>
+                                          </p:stCondLst>
+                                        </p:cTn>
+                                        <p:tgtEl>
+                                          <p:spTgt spid="37"/>
+                                        </p:tgtEl>
+                                        <p:attrNameLst>
+                                          <p:attrName>style.visibility</p:attrName>
+                                        </p:attrNameLst>
+                                      </p:cBhvr>
+                                      <p:to>
+                                        <p:strVal val="visible"/>
+                                      </p:to>
+                                    </p:set>
+                                    <p:animEffect transition="in" filter="wipe(down)">
+                                      <p:cBhvr>
+                                        <p:cTn id="86" dur="500"/>
+                                        <p:tgtEl>
+                                          <p:spTgt spid="37"/>
+                                        </p:tgtEl>
+                                      </p:cBhvr>
+                                    </p:animEffect>
+                                  </p:childTnLst>
+                                </p:cTn>
+                              </p:par>
+                              <p:par>
+                                <p:cTn id="87" presetID="22" presetClass="entr" presetSubtype="4" fill="hold" grpId="0" nodeType="withEffect">
+                                  <p:stCondLst>
+                                    <p:cond delay="0"/>
+                                  </p:stCondLst>
+                                  <p:childTnLst>
+                                    <p:set>
+                                      <p:cBhvr>
+                                        <p:cTn id="88" dur="1" fill="hold">
+                                          <p:stCondLst>
+                                            <p:cond delay="0"/>
+                                          </p:stCondLst>
+                                        </p:cTn>
+                                        <p:tgtEl>
+                                          <p:spTgt spid="33"/>
+                                        </p:tgtEl>
+                                        <p:attrNameLst>
+                                          <p:attrName>style.visibility</p:attrName>
+                                        </p:attrNameLst>
+                                      </p:cBhvr>
+                                      <p:to>
+                                        <p:strVal val="visible"/>
+                                      </p:to>
+                                    </p:set>
+                                    <p:animEffect transition="in" filter="wipe(down)">
+                                      <p:cBhvr>
+                                        <p:cTn id="89" dur="500"/>
+                                        <p:tgtEl>
+                                          <p:spTgt spid="33"/>
+                                        </p:tgtEl>
+                                      </p:cBhvr>
+                                    </p:animEffect>
+                                  </p:childTnLst>
+                                </p:cTn>
+                              </p:par>
+                            </p:childTnLst>
+                          </p:cTn>
+                        </p:par>
+                      </p:childTnLst>
+                    </p:cTn>
+                  </p:par>
+                  <p:par>
+                    <p:cTn id="90" fill="hold">
+                      <p:stCondLst>
+                        <p:cond delay="indefinite"/>
+                      </p:stCondLst>
+                      <p:childTnLst>
+                        <p:par>
+                          <p:cTn id="91" fill="hold">
+                            <p:stCondLst>
+                              <p:cond delay="0"/>
+                            </p:stCondLst>
+                            <p:childTnLst>
+                              <p:par>
+                                <p:cTn id="92" presetID="22" presetClass="entr" presetSubtype="4" fill="hold" nodeType="clickEffect">
+                                  <p:stCondLst>
+                                    <p:cond delay="0"/>
+                                  </p:stCondLst>
+                                  <p:childTnLst>
+                                    <p:set>
+                                      <p:cBhvr>
+                                        <p:cTn id="93" dur="1" fill="hold">
+                                          <p:stCondLst>
+                                            <p:cond delay="0"/>
+                                          </p:stCondLst>
+                                        </p:cTn>
+                                        <p:tgtEl>
+                                          <p:spTgt spid="39"/>
+                                        </p:tgtEl>
+                                        <p:attrNameLst>
+                                          <p:attrName>style.visibility</p:attrName>
+                                        </p:attrNameLst>
+                                      </p:cBhvr>
+                                      <p:to>
+                                        <p:strVal val="visible"/>
+                                      </p:to>
+                                    </p:set>
+                                    <p:animEffect transition="in" filter="wipe(down)">
+                                      <p:cBhvr>
+                                        <p:cTn id="94" dur="500"/>
+                                        <p:tgtEl>
+                                          <p:spTgt spid="39"/>
+                                        </p:tgtEl>
+                                      </p:cBhvr>
+                                    </p:animEffect>
+                                  </p:childTnLst>
+                                </p:cTn>
+                              </p:par>
+                              <p:par>
+                                <p:cTn id="95" presetID="22" presetClass="entr" presetSubtype="4" fill="hold" grpId="0" nodeType="withEffect">
+                                  <p:stCondLst>
+                                    <p:cond delay="0"/>
+                                  </p:stCondLst>
+                                  <p:childTnLst>
+                                    <p:set>
+                                      <p:cBhvr>
+                                        <p:cTn id="96" dur="1" fill="hold">
+                                          <p:stCondLst>
+                                            <p:cond delay="0"/>
+                                          </p:stCondLst>
+                                        </p:cTn>
+                                        <p:tgtEl>
+                                          <p:spTgt spid="35"/>
+                                        </p:tgtEl>
+                                        <p:attrNameLst>
+                                          <p:attrName>style.visibility</p:attrName>
+                                        </p:attrNameLst>
+                                      </p:cBhvr>
+                                      <p:to>
+                                        <p:strVal val="visible"/>
+                                      </p:to>
+                                    </p:set>
+                                    <p:animEffect transition="in" filter="wipe(down)">
+                                      <p:cBhvr>
+                                        <p:cTn id="97" dur="500"/>
+                                        <p:tgtEl>
+                                          <p:spTgt spid="35"/>
+                                        </p:tgtEl>
+                                      </p:cBhvr>
+                                    </p:animEffect>
+                                  </p:childTnLst>
+                                </p:cTn>
+                              </p:par>
+                            </p:childTnLst>
+                          </p:cTn>
+                        </p:par>
+                      </p:childTnLst>
+                    </p:cTn>
+                  </p:par>
+                  <p:par>
+                    <p:cTn id="98" fill="hold">
+                      <p:stCondLst>
+                        <p:cond delay="indefinite"/>
+                      </p:stCondLst>
+                      <p:childTnLst>
+                        <p:par>
+                          <p:cTn id="99" fill="hold">
+                            <p:stCondLst>
+                              <p:cond delay="0"/>
+                            </p:stCondLst>
+                            <p:childTnLst>
+                              <p:par>
+                                <p:cTn id="100" presetID="22" presetClass="entr" presetSubtype="4" fill="hold" nodeType="clickEffect">
+                                  <p:stCondLst>
+                                    <p:cond delay="0"/>
+                                  </p:stCondLst>
+                                  <p:childTnLst>
+                                    <p:set>
+                                      <p:cBhvr>
+                                        <p:cTn id="101" dur="1" fill="hold">
+                                          <p:stCondLst>
+                                            <p:cond delay="0"/>
+                                          </p:stCondLst>
+                                        </p:cTn>
+                                        <p:tgtEl>
+                                          <p:spTgt spid="38"/>
+                                        </p:tgtEl>
+                                        <p:attrNameLst>
+                                          <p:attrName>style.visibility</p:attrName>
+                                        </p:attrNameLst>
+                                      </p:cBhvr>
+                                      <p:to>
+                                        <p:strVal val="visible"/>
+                                      </p:to>
+                                    </p:set>
+                                    <p:animEffect transition="in" filter="wipe(down)">
+                                      <p:cBhvr>
+                                        <p:cTn id="102" dur="500"/>
+                                        <p:tgtEl>
+                                          <p:spTgt spid="38"/>
+                                        </p:tgtEl>
+                                      </p:cBhvr>
+                                    </p:animEffect>
+                                  </p:childTnLst>
+                                </p:cTn>
+                              </p:par>
+                              <p:par>
+                                <p:cTn id="103" presetID="22" presetClass="entr" presetSubtype="4" fill="hold" grpId="0" nodeType="withEffect">
+                                  <p:stCondLst>
+                                    <p:cond delay="0"/>
+                                  </p:stCondLst>
+                                  <p:childTnLst>
+                                    <p:set>
+                                      <p:cBhvr>
+                                        <p:cTn id="104" dur="1" fill="hold">
+                                          <p:stCondLst>
+                                            <p:cond delay="0"/>
+                                          </p:stCondLst>
+                                        </p:cTn>
+                                        <p:tgtEl>
+                                          <p:spTgt spid="34"/>
+                                        </p:tgtEl>
+                                        <p:attrNameLst>
+                                          <p:attrName>style.visibility</p:attrName>
+                                        </p:attrNameLst>
+                                      </p:cBhvr>
+                                      <p:to>
+                                        <p:strVal val="visible"/>
+                                      </p:to>
+                                    </p:set>
+                                    <p:animEffect transition="in" filter="wipe(down)">
+                                      <p:cBhvr>
+                                        <p:cTn id="105" dur="500"/>
+                                        <p:tgtEl>
+                                          <p:spTgt spid="34"/>
+                                        </p:tgtEl>
+                                      </p:cBhvr>
+                                    </p:animEffect>
+                                  </p:childTnLst>
+                                </p:cTn>
+                              </p:par>
+                            </p:childTnLst>
+                          </p:cTn>
+                        </p:par>
+                      </p:childTnLst>
+                    </p:cTn>
+                  </p:par>
+                  <p:par>
+                    <p:cTn id="106" fill="hold">
+                      <p:stCondLst>
+                        <p:cond delay="indefinite"/>
+                      </p:stCondLst>
+                      <p:childTnLst>
+                        <p:par>
+                          <p:cTn id="107" fill="hold">
+                            <p:stCondLst>
+                              <p:cond delay="0"/>
+                            </p:stCondLst>
+                            <p:childTnLst>
+                              <p:par>
+                                <p:cTn id="108" presetID="22" presetClass="entr" presetSubtype="4" fill="hold" nodeType="clickEffect">
+                                  <p:stCondLst>
+                                    <p:cond delay="0"/>
+                                  </p:stCondLst>
+                                  <p:childTnLst>
+                                    <p:set>
+                                      <p:cBhvr>
+                                        <p:cTn id="109" dur="1" fill="hold">
+                                          <p:stCondLst>
+                                            <p:cond delay="0"/>
+                                          </p:stCondLst>
+                                        </p:cTn>
+                                        <p:tgtEl>
+                                          <p:spTgt spid="40"/>
+                                        </p:tgtEl>
+                                        <p:attrNameLst>
+                                          <p:attrName>style.visibility</p:attrName>
+                                        </p:attrNameLst>
+                                      </p:cBhvr>
+                                      <p:to>
+                                        <p:strVal val="visible"/>
+                                      </p:to>
+                                    </p:set>
+                                    <p:animEffect transition="in" filter="wipe(down)">
+                                      <p:cBhvr>
+                                        <p:cTn id="110" dur="500"/>
+                                        <p:tgtEl>
+                                          <p:spTgt spid="40"/>
+                                        </p:tgtEl>
+                                      </p:cBhvr>
+                                    </p:animEffect>
+                                  </p:childTnLst>
+                                </p:cTn>
+                              </p:par>
+                              <p:par>
+                                <p:cTn id="111" presetID="22" presetClass="entr" presetSubtype="4" fill="hold" grpId="0" nodeType="withEffect">
+                                  <p:stCondLst>
+                                    <p:cond delay="0"/>
+                                  </p:stCondLst>
+                                  <p:childTnLst>
+                                    <p:set>
+                                      <p:cBhvr>
+                                        <p:cTn id="112" dur="1" fill="hold">
+                                          <p:stCondLst>
+                                            <p:cond delay="0"/>
+                                          </p:stCondLst>
+                                        </p:cTn>
+                                        <p:tgtEl>
+                                          <p:spTgt spid="36"/>
+                                        </p:tgtEl>
+                                        <p:attrNameLst>
+                                          <p:attrName>style.visibility</p:attrName>
+                                        </p:attrNameLst>
+                                      </p:cBhvr>
+                                      <p:to>
+                                        <p:strVal val="visible"/>
+                                      </p:to>
+                                    </p:set>
+                                    <p:animEffect transition="in" filter="wipe(down)">
+                                      <p:cBhvr>
+                                        <p:cTn id="113" dur="500"/>
+                                        <p:tgtEl>
+                                          <p:spTgt spid="36"/>
+                                        </p:tgtEl>
+                                      </p:cBhvr>
+                                    </p:animEffect>
+                                  </p:childTnLst>
+                                </p:cTn>
+                              </p:par>
+                            </p:childTnLst>
+                          </p:cTn>
+                        </p:par>
+                      </p:childTnLst>
+                    </p:cTn>
+                  </p:par>
+                  <p:par>
+                    <p:cTn id="114" fill="hold">
+                      <p:stCondLst>
+                        <p:cond delay="indefinite"/>
+                      </p:stCondLst>
+                      <p:childTnLst>
+                        <p:par>
+                          <p:cTn id="115" fill="hold">
+                            <p:stCondLst>
+                              <p:cond delay="0"/>
+                            </p:stCondLst>
+                            <p:childTnLst>
+                              <p:par>
+                                <p:cTn id="116" presetID="53" presetClass="entr" presetSubtype="16" fill="hold" grpId="0" nodeType="clickEffect">
+                                  <p:stCondLst>
+                                    <p:cond delay="0"/>
+                                  </p:stCondLst>
+                                  <p:childTnLst>
+                                    <p:set>
+                                      <p:cBhvr>
+                                        <p:cTn id="117" dur="1" fill="hold">
+                                          <p:stCondLst>
+                                            <p:cond delay="0"/>
+                                          </p:stCondLst>
+                                        </p:cTn>
+                                        <p:tgtEl>
+                                          <p:spTgt spid="50"/>
+                                        </p:tgtEl>
+                                        <p:attrNameLst>
+                                          <p:attrName>style.visibility</p:attrName>
+                                        </p:attrNameLst>
+                                      </p:cBhvr>
+                                      <p:to>
+                                        <p:strVal val="visible"/>
+                                      </p:to>
+                                    </p:set>
+                                    <p:anim calcmode="lin" valueType="num">
+                                      <p:cBhvr>
+                                        <p:cTn id="118" dur="500" fill="hold"/>
+                                        <p:tgtEl>
+                                          <p:spTgt spid="50"/>
+                                        </p:tgtEl>
+                                        <p:attrNameLst>
+                                          <p:attrName>ppt_w</p:attrName>
+                                        </p:attrNameLst>
+                                      </p:cBhvr>
+                                      <p:tavLst>
+                                        <p:tav tm="0">
+                                          <p:val>
+                                            <p:fltVal val="0"/>
+                                          </p:val>
+                                        </p:tav>
+                                        <p:tav tm="100000">
+                                          <p:val>
+                                            <p:strVal val="#ppt_w"/>
+                                          </p:val>
+                                        </p:tav>
+                                      </p:tavLst>
+                                    </p:anim>
+                                    <p:anim calcmode="lin" valueType="num">
+                                      <p:cBhvr>
+                                        <p:cTn id="119" dur="500" fill="hold"/>
+                                        <p:tgtEl>
+                                          <p:spTgt spid="50"/>
+                                        </p:tgtEl>
+                                        <p:attrNameLst>
+                                          <p:attrName>ppt_h</p:attrName>
+                                        </p:attrNameLst>
+                                      </p:cBhvr>
+                                      <p:tavLst>
+                                        <p:tav tm="0">
+                                          <p:val>
+                                            <p:fltVal val="0"/>
+                                          </p:val>
+                                        </p:tav>
+                                        <p:tav tm="100000">
+                                          <p:val>
+                                            <p:strVal val="#ppt_h"/>
+                                          </p:val>
+                                        </p:tav>
+                                      </p:tavLst>
+                                    </p:anim>
+                                    <p:animEffect transition="in" filter="fade">
+                                      <p:cBhvr>
+                                        <p:cTn id="120" dur="500"/>
+                                        <p:tgtEl>
+                                          <p:spTgt spid="50"/>
+                                        </p:tgtEl>
+                                      </p:cBhvr>
+                                    </p:animEffect>
+                                  </p:childTnLst>
+                                </p:cTn>
+                              </p:par>
+                            </p:childTnLst>
+                          </p:cTn>
+                        </p:par>
+                      </p:childTnLst>
+                    </p:cTn>
+                  </p:par>
+                </p:childTnLst>
+              </p:cTn>
+              <p:prevCondLst>
+                <p:cond evt="onPrev" delay="0">
+                  <p:tgtEl>
+                    <p:sldTgt/>
+                  </p:tgtEl>
+                </p:cond>
+              </p:prevCondLst>
+              <p:nextCondLst>
+                <p:cond evt="onNext" delay="0">
+                  <p:tgtEl>
+                    <p:sldTgt/>
+                  </p:tgtEl>
+                </p:cond>
+              </p:nextCondLst>
+            </p:seq>
+          </p:childTnLst>
+        </p:cTn>
+      </p:par>
+    </p:tnLst>
+    <p:bldLst>
+      <p:bldP spid="3" grpId="0" animBg="1"/>
+      <p:bldP spid="4" grpId="0" animBg="1"/>
+      <p:bldP spid="5" grpId="0" animBg="1"/>
+      <p:bldP spid="6" grpId="0" animBg="1"/>
+      <p:bldP spid="7" grpId="0" animBg="1"/>
+      <p:bldP spid="8" grpId="0" animBg="1"/>
+      <p:bldP spid="18" grpId="0" animBg="1"/>
+      <p:bldP spid="19" grpId="0" animBg="1"/>
+      <p:bldP spid="20" grpId="0" animBg="1"/>
+      <p:bldP spid="21" grpId="0" animBg="1"/>
+      <p:bldP spid="32" grpId="0" animBg="1"/>
+      <p:bldP spid="33" grpId="0" animBg="1"/>
+      <p:bldP spid="34" grpId="0" animBg="1"/>
+      <p:bldP spid="35" grpId="0" animBg="1"/>
+      <p:bldP spid="36" grpId="0" animBg="1"/>
+      <p:bldP spid="50" grpId="0"/>
+    </p:bldLst>
+  </p:timing>
 </p:sld>
 </file>
 
